--- a/CV_project_presentation.pptx
+++ b/CV_project_presentation.pptx
@@ -313,13 +313,20 @@
           </a:bodyPr>
           <a:lstStyle>
             <a:lvl1pPr lvl="0" marR="0" rtl="0" algn="l">
-              <a:spcBef>
-                <a:spcPts val="0"/>
-              </a:spcBef>
-              <a:spcAft>
-                <a:spcPts val="0"/>
-              </a:spcAft>
+              <a:lnSpc>
+                <a:spcPct val="100000"/>
+              </a:lnSpc>
+              <a:spcBef>
+                <a:spcPts val="0"/>
+              </a:spcBef>
+              <a:spcAft>
+                <a:spcPts val="0"/>
+              </a:spcAft>
+              <a:buClr>
+                <a:srgbClr val="000000"/>
+              </a:buClr>
               <a:buSzPts val="1400"/>
+              <a:buFont typeface="Arial"/>
               <a:buNone/>
               <a:defRPr b="0" i="0" sz="1200" u="none" cap="none" strike="noStrike">
                 <a:solidFill>
@@ -332,13 +339,20 @@
               </a:defRPr>
             </a:lvl1pPr>
             <a:lvl2pPr lvl="1" marR="0" rtl="0" algn="l">
-              <a:spcBef>
-                <a:spcPts val="0"/>
-              </a:spcBef>
-              <a:spcAft>
-                <a:spcPts val="0"/>
-              </a:spcAft>
+              <a:lnSpc>
+                <a:spcPct val="100000"/>
+              </a:lnSpc>
+              <a:spcBef>
+                <a:spcPts val="0"/>
+              </a:spcBef>
+              <a:spcAft>
+                <a:spcPts val="0"/>
+              </a:spcAft>
+              <a:buClr>
+                <a:srgbClr val="000000"/>
+              </a:buClr>
               <a:buSzPts val="1400"/>
+              <a:buFont typeface="Arial"/>
               <a:buNone/>
               <a:defRPr b="0" i="0" sz="1800" u="none" cap="none" strike="noStrike">
                 <a:solidFill>
@@ -351,13 +365,20 @@
               </a:defRPr>
             </a:lvl2pPr>
             <a:lvl3pPr lvl="2" marR="0" rtl="0" algn="l">
-              <a:spcBef>
-                <a:spcPts val="0"/>
-              </a:spcBef>
-              <a:spcAft>
-                <a:spcPts val="0"/>
-              </a:spcAft>
+              <a:lnSpc>
+                <a:spcPct val="100000"/>
+              </a:lnSpc>
+              <a:spcBef>
+                <a:spcPts val="0"/>
+              </a:spcBef>
+              <a:spcAft>
+                <a:spcPts val="0"/>
+              </a:spcAft>
+              <a:buClr>
+                <a:srgbClr val="000000"/>
+              </a:buClr>
               <a:buSzPts val="1400"/>
+              <a:buFont typeface="Arial"/>
               <a:buNone/>
               <a:defRPr b="0" i="0" sz="1800" u="none" cap="none" strike="noStrike">
                 <a:solidFill>
@@ -370,13 +391,20 @@
               </a:defRPr>
             </a:lvl3pPr>
             <a:lvl4pPr lvl="3" marR="0" rtl="0" algn="l">
-              <a:spcBef>
-                <a:spcPts val="0"/>
-              </a:spcBef>
-              <a:spcAft>
-                <a:spcPts val="0"/>
-              </a:spcAft>
+              <a:lnSpc>
+                <a:spcPct val="100000"/>
+              </a:lnSpc>
+              <a:spcBef>
+                <a:spcPts val="0"/>
+              </a:spcBef>
+              <a:spcAft>
+                <a:spcPts val="0"/>
+              </a:spcAft>
+              <a:buClr>
+                <a:srgbClr val="000000"/>
+              </a:buClr>
               <a:buSzPts val="1400"/>
+              <a:buFont typeface="Arial"/>
               <a:buNone/>
               <a:defRPr b="0" i="0" sz="1800" u="none" cap="none" strike="noStrike">
                 <a:solidFill>
@@ -389,13 +417,20 @@
               </a:defRPr>
             </a:lvl4pPr>
             <a:lvl5pPr lvl="4" marR="0" rtl="0" algn="l">
-              <a:spcBef>
-                <a:spcPts val="0"/>
-              </a:spcBef>
-              <a:spcAft>
-                <a:spcPts val="0"/>
-              </a:spcAft>
+              <a:lnSpc>
+                <a:spcPct val="100000"/>
+              </a:lnSpc>
+              <a:spcBef>
+                <a:spcPts val="0"/>
+              </a:spcBef>
+              <a:spcAft>
+                <a:spcPts val="0"/>
+              </a:spcAft>
+              <a:buClr>
+                <a:srgbClr val="000000"/>
+              </a:buClr>
               <a:buSzPts val="1400"/>
+              <a:buFont typeface="Arial"/>
               <a:buNone/>
               <a:defRPr b="0" i="0" sz="1800" u="none" cap="none" strike="noStrike">
                 <a:solidFill>
@@ -408,13 +443,20 @@
               </a:defRPr>
             </a:lvl5pPr>
             <a:lvl6pPr lvl="5" marR="0" rtl="0" algn="l">
-              <a:spcBef>
-                <a:spcPts val="0"/>
-              </a:spcBef>
-              <a:spcAft>
-                <a:spcPts val="0"/>
-              </a:spcAft>
+              <a:lnSpc>
+                <a:spcPct val="100000"/>
+              </a:lnSpc>
+              <a:spcBef>
+                <a:spcPts val="0"/>
+              </a:spcBef>
+              <a:spcAft>
+                <a:spcPts val="0"/>
+              </a:spcAft>
+              <a:buClr>
+                <a:srgbClr val="000000"/>
+              </a:buClr>
               <a:buSzPts val="1400"/>
+              <a:buFont typeface="Arial"/>
               <a:buNone/>
               <a:defRPr b="0" i="0" sz="1800" u="none" cap="none" strike="noStrike">
                 <a:solidFill>
@@ -427,13 +469,20 @@
               </a:defRPr>
             </a:lvl6pPr>
             <a:lvl7pPr lvl="6" marR="0" rtl="0" algn="l">
-              <a:spcBef>
-                <a:spcPts val="0"/>
-              </a:spcBef>
-              <a:spcAft>
-                <a:spcPts val="0"/>
-              </a:spcAft>
+              <a:lnSpc>
+                <a:spcPct val="100000"/>
+              </a:lnSpc>
+              <a:spcBef>
+                <a:spcPts val="0"/>
+              </a:spcBef>
+              <a:spcAft>
+                <a:spcPts val="0"/>
+              </a:spcAft>
+              <a:buClr>
+                <a:srgbClr val="000000"/>
+              </a:buClr>
               <a:buSzPts val="1400"/>
+              <a:buFont typeface="Arial"/>
               <a:buNone/>
               <a:defRPr b="0" i="0" sz="1800" u="none" cap="none" strike="noStrike">
                 <a:solidFill>
@@ -446,13 +495,20 @@
               </a:defRPr>
             </a:lvl7pPr>
             <a:lvl8pPr lvl="7" marR="0" rtl="0" algn="l">
-              <a:spcBef>
-                <a:spcPts val="0"/>
-              </a:spcBef>
-              <a:spcAft>
-                <a:spcPts val="0"/>
-              </a:spcAft>
+              <a:lnSpc>
+                <a:spcPct val="100000"/>
+              </a:lnSpc>
+              <a:spcBef>
+                <a:spcPts val="0"/>
+              </a:spcBef>
+              <a:spcAft>
+                <a:spcPts val="0"/>
+              </a:spcAft>
+              <a:buClr>
+                <a:srgbClr val="000000"/>
+              </a:buClr>
               <a:buSzPts val="1400"/>
+              <a:buFont typeface="Arial"/>
               <a:buNone/>
               <a:defRPr b="0" i="0" sz="1800" u="none" cap="none" strike="noStrike">
                 <a:solidFill>
@@ -465,13 +521,20 @@
               </a:defRPr>
             </a:lvl8pPr>
             <a:lvl9pPr lvl="8" marR="0" rtl="0" algn="l">
-              <a:spcBef>
-                <a:spcPts val="0"/>
-              </a:spcBef>
-              <a:spcAft>
-                <a:spcPts val="0"/>
-              </a:spcAft>
+              <a:lnSpc>
+                <a:spcPct val="100000"/>
+              </a:lnSpc>
+              <a:spcBef>
+                <a:spcPts val="0"/>
+              </a:spcBef>
+              <a:spcAft>
+                <a:spcPts val="0"/>
+              </a:spcAft>
+              <a:buClr>
+                <a:srgbClr val="000000"/>
+              </a:buClr>
               <a:buSzPts val="1400"/>
+              <a:buFont typeface="Arial"/>
               <a:buNone/>
               <a:defRPr b="0" i="0" sz="1800" u="none" cap="none" strike="noStrike">
                 <a:solidFill>
@@ -514,13 +577,20 @@
           </a:bodyPr>
           <a:lstStyle>
             <a:lvl1pPr lvl="0" marR="0" rtl="0" algn="r">
-              <a:spcBef>
-                <a:spcPts val="0"/>
-              </a:spcBef>
-              <a:spcAft>
-                <a:spcPts val="0"/>
-              </a:spcAft>
+              <a:lnSpc>
+                <a:spcPct val="100000"/>
+              </a:lnSpc>
+              <a:spcBef>
+                <a:spcPts val="0"/>
+              </a:spcBef>
+              <a:spcAft>
+                <a:spcPts val="0"/>
+              </a:spcAft>
+              <a:buClr>
+                <a:srgbClr val="000000"/>
+              </a:buClr>
               <a:buSzPts val="1400"/>
+              <a:buFont typeface="Arial"/>
               <a:buNone/>
               <a:defRPr b="0" i="0" sz="1200" u="none" cap="none" strike="noStrike">
                 <a:solidFill>
@@ -533,13 +603,20 @@
               </a:defRPr>
             </a:lvl1pPr>
             <a:lvl2pPr lvl="1" marR="0" rtl="0" algn="l">
-              <a:spcBef>
-                <a:spcPts val="0"/>
-              </a:spcBef>
-              <a:spcAft>
-                <a:spcPts val="0"/>
-              </a:spcAft>
+              <a:lnSpc>
+                <a:spcPct val="100000"/>
+              </a:lnSpc>
+              <a:spcBef>
+                <a:spcPts val="0"/>
+              </a:spcBef>
+              <a:spcAft>
+                <a:spcPts val="0"/>
+              </a:spcAft>
+              <a:buClr>
+                <a:srgbClr val="000000"/>
+              </a:buClr>
               <a:buSzPts val="1400"/>
+              <a:buFont typeface="Arial"/>
               <a:buNone/>
               <a:defRPr b="0" i="0" sz="1800" u="none" cap="none" strike="noStrike">
                 <a:solidFill>
@@ -552,13 +629,20 @@
               </a:defRPr>
             </a:lvl2pPr>
             <a:lvl3pPr lvl="2" marR="0" rtl="0" algn="l">
-              <a:spcBef>
-                <a:spcPts val="0"/>
-              </a:spcBef>
-              <a:spcAft>
-                <a:spcPts val="0"/>
-              </a:spcAft>
+              <a:lnSpc>
+                <a:spcPct val="100000"/>
+              </a:lnSpc>
+              <a:spcBef>
+                <a:spcPts val="0"/>
+              </a:spcBef>
+              <a:spcAft>
+                <a:spcPts val="0"/>
+              </a:spcAft>
+              <a:buClr>
+                <a:srgbClr val="000000"/>
+              </a:buClr>
               <a:buSzPts val="1400"/>
+              <a:buFont typeface="Arial"/>
               <a:buNone/>
               <a:defRPr b="0" i="0" sz="1800" u="none" cap="none" strike="noStrike">
                 <a:solidFill>
@@ -571,13 +655,20 @@
               </a:defRPr>
             </a:lvl3pPr>
             <a:lvl4pPr lvl="3" marR="0" rtl="0" algn="l">
-              <a:spcBef>
-                <a:spcPts val="0"/>
-              </a:spcBef>
-              <a:spcAft>
-                <a:spcPts val="0"/>
-              </a:spcAft>
+              <a:lnSpc>
+                <a:spcPct val="100000"/>
+              </a:lnSpc>
+              <a:spcBef>
+                <a:spcPts val="0"/>
+              </a:spcBef>
+              <a:spcAft>
+                <a:spcPts val="0"/>
+              </a:spcAft>
+              <a:buClr>
+                <a:srgbClr val="000000"/>
+              </a:buClr>
               <a:buSzPts val="1400"/>
+              <a:buFont typeface="Arial"/>
               <a:buNone/>
               <a:defRPr b="0" i="0" sz="1800" u="none" cap="none" strike="noStrike">
                 <a:solidFill>
@@ -590,13 +681,20 @@
               </a:defRPr>
             </a:lvl4pPr>
             <a:lvl5pPr lvl="4" marR="0" rtl="0" algn="l">
-              <a:spcBef>
-                <a:spcPts val="0"/>
-              </a:spcBef>
-              <a:spcAft>
-                <a:spcPts val="0"/>
-              </a:spcAft>
+              <a:lnSpc>
+                <a:spcPct val="100000"/>
+              </a:lnSpc>
+              <a:spcBef>
+                <a:spcPts val="0"/>
+              </a:spcBef>
+              <a:spcAft>
+                <a:spcPts val="0"/>
+              </a:spcAft>
+              <a:buClr>
+                <a:srgbClr val="000000"/>
+              </a:buClr>
               <a:buSzPts val="1400"/>
+              <a:buFont typeface="Arial"/>
               <a:buNone/>
               <a:defRPr b="0" i="0" sz="1800" u="none" cap="none" strike="noStrike">
                 <a:solidFill>
@@ -609,13 +707,20 @@
               </a:defRPr>
             </a:lvl5pPr>
             <a:lvl6pPr lvl="5" marR="0" rtl="0" algn="l">
-              <a:spcBef>
-                <a:spcPts val="0"/>
-              </a:spcBef>
-              <a:spcAft>
-                <a:spcPts val="0"/>
-              </a:spcAft>
+              <a:lnSpc>
+                <a:spcPct val="100000"/>
+              </a:lnSpc>
+              <a:spcBef>
+                <a:spcPts val="0"/>
+              </a:spcBef>
+              <a:spcAft>
+                <a:spcPts val="0"/>
+              </a:spcAft>
+              <a:buClr>
+                <a:srgbClr val="000000"/>
+              </a:buClr>
               <a:buSzPts val="1400"/>
+              <a:buFont typeface="Arial"/>
               <a:buNone/>
               <a:defRPr b="0" i="0" sz="1800" u="none" cap="none" strike="noStrike">
                 <a:solidFill>
@@ -628,13 +733,20 @@
               </a:defRPr>
             </a:lvl6pPr>
             <a:lvl7pPr lvl="6" marR="0" rtl="0" algn="l">
-              <a:spcBef>
-                <a:spcPts val="0"/>
-              </a:spcBef>
-              <a:spcAft>
-                <a:spcPts val="0"/>
-              </a:spcAft>
+              <a:lnSpc>
+                <a:spcPct val="100000"/>
+              </a:lnSpc>
+              <a:spcBef>
+                <a:spcPts val="0"/>
+              </a:spcBef>
+              <a:spcAft>
+                <a:spcPts val="0"/>
+              </a:spcAft>
+              <a:buClr>
+                <a:srgbClr val="000000"/>
+              </a:buClr>
               <a:buSzPts val="1400"/>
+              <a:buFont typeface="Arial"/>
               <a:buNone/>
               <a:defRPr b="0" i="0" sz="1800" u="none" cap="none" strike="noStrike">
                 <a:solidFill>
@@ -647,13 +759,20 @@
               </a:defRPr>
             </a:lvl7pPr>
             <a:lvl8pPr lvl="7" marR="0" rtl="0" algn="l">
-              <a:spcBef>
-                <a:spcPts val="0"/>
-              </a:spcBef>
-              <a:spcAft>
-                <a:spcPts val="0"/>
-              </a:spcAft>
+              <a:lnSpc>
+                <a:spcPct val="100000"/>
+              </a:lnSpc>
+              <a:spcBef>
+                <a:spcPts val="0"/>
+              </a:spcBef>
+              <a:spcAft>
+                <a:spcPts val="0"/>
+              </a:spcAft>
+              <a:buClr>
+                <a:srgbClr val="000000"/>
+              </a:buClr>
               <a:buSzPts val="1400"/>
+              <a:buFont typeface="Arial"/>
               <a:buNone/>
               <a:defRPr b="0" i="0" sz="1800" u="none" cap="none" strike="noStrike">
                 <a:solidFill>
@@ -666,13 +785,20 @@
               </a:defRPr>
             </a:lvl8pPr>
             <a:lvl9pPr lvl="8" marR="0" rtl="0" algn="l">
-              <a:spcBef>
-                <a:spcPts val="0"/>
-              </a:spcBef>
-              <a:spcAft>
-                <a:spcPts val="0"/>
-              </a:spcAft>
+              <a:lnSpc>
+                <a:spcPct val="100000"/>
+              </a:lnSpc>
+              <a:spcBef>
+                <a:spcPts val="0"/>
+              </a:spcBef>
+              <a:spcAft>
+                <a:spcPts val="0"/>
+              </a:spcAft>
+              <a:buClr>
+                <a:srgbClr val="000000"/>
+              </a:buClr>
               <a:buSzPts val="1400"/>
+              <a:buFont typeface="Arial"/>
               <a:buNone/>
               <a:defRPr b="0" i="0" sz="1800" u="none" cap="none" strike="noStrike">
                 <a:solidFill>
@@ -760,13 +886,20 @@
           </a:bodyPr>
           <a:lstStyle>
             <a:lvl1pPr indent="-228600" lvl="0" marL="457200" marR="0" rtl="0" algn="l">
-              <a:spcBef>
-                <a:spcPts val="0"/>
-              </a:spcBef>
-              <a:spcAft>
-                <a:spcPts val="0"/>
-              </a:spcAft>
+              <a:lnSpc>
+                <a:spcPct val="100000"/>
+              </a:lnSpc>
+              <a:spcBef>
+                <a:spcPts val="0"/>
+              </a:spcBef>
+              <a:spcAft>
+                <a:spcPts val="0"/>
+              </a:spcAft>
+              <a:buClr>
+                <a:srgbClr val="000000"/>
+              </a:buClr>
               <a:buSzPts val="1400"/>
+              <a:buFont typeface="Arial"/>
               <a:buNone/>
               <a:defRPr b="0" i="0" sz="1200" u="none" cap="none" strike="noStrike">
                 <a:solidFill>
@@ -779,13 +912,20 @@
               </a:defRPr>
             </a:lvl1pPr>
             <a:lvl2pPr indent="-228600" lvl="1" marL="914400" marR="0" rtl="0" algn="l">
-              <a:spcBef>
-                <a:spcPts val="0"/>
-              </a:spcBef>
-              <a:spcAft>
-                <a:spcPts val="0"/>
-              </a:spcAft>
+              <a:lnSpc>
+                <a:spcPct val="100000"/>
+              </a:lnSpc>
+              <a:spcBef>
+                <a:spcPts val="0"/>
+              </a:spcBef>
+              <a:spcAft>
+                <a:spcPts val="0"/>
+              </a:spcAft>
+              <a:buClr>
+                <a:srgbClr val="000000"/>
+              </a:buClr>
               <a:buSzPts val="1400"/>
+              <a:buFont typeface="Arial"/>
               <a:buNone/>
               <a:defRPr b="0" i="0" sz="1200" u="none" cap="none" strike="noStrike">
                 <a:solidFill>
@@ -798,13 +938,20 @@
               </a:defRPr>
             </a:lvl2pPr>
             <a:lvl3pPr indent="-228600" lvl="2" marL="1371600" marR="0" rtl="0" algn="l">
-              <a:spcBef>
-                <a:spcPts val="0"/>
-              </a:spcBef>
-              <a:spcAft>
-                <a:spcPts val="0"/>
-              </a:spcAft>
+              <a:lnSpc>
+                <a:spcPct val="100000"/>
+              </a:lnSpc>
+              <a:spcBef>
+                <a:spcPts val="0"/>
+              </a:spcBef>
+              <a:spcAft>
+                <a:spcPts val="0"/>
+              </a:spcAft>
+              <a:buClr>
+                <a:srgbClr val="000000"/>
+              </a:buClr>
               <a:buSzPts val="1400"/>
+              <a:buFont typeface="Arial"/>
               <a:buNone/>
               <a:defRPr b="0" i="0" sz="1200" u="none" cap="none" strike="noStrike">
                 <a:solidFill>
@@ -817,13 +964,20 @@
               </a:defRPr>
             </a:lvl3pPr>
             <a:lvl4pPr indent="-228600" lvl="3" marL="1828800" marR="0" rtl="0" algn="l">
-              <a:spcBef>
-                <a:spcPts val="0"/>
-              </a:spcBef>
-              <a:spcAft>
-                <a:spcPts val="0"/>
-              </a:spcAft>
+              <a:lnSpc>
+                <a:spcPct val="100000"/>
+              </a:lnSpc>
+              <a:spcBef>
+                <a:spcPts val="0"/>
+              </a:spcBef>
+              <a:spcAft>
+                <a:spcPts val="0"/>
+              </a:spcAft>
+              <a:buClr>
+                <a:srgbClr val="000000"/>
+              </a:buClr>
               <a:buSzPts val="1400"/>
+              <a:buFont typeface="Arial"/>
               <a:buNone/>
               <a:defRPr b="0" i="0" sz="1200" u="none" cap="none" strike="noStrike">
                 <a:solidFill>
@@ -836,13 +990,20 @@
               </a:defRPr>
             </a:lvl4pPr>
             <a:lvl5pPr indent="-228600" lvl="4" marL="2286000" marR="0" rtl="0" algn="l">
-              <a:spcBef>
-                <a:spcPts val="0"/>
-              </a:spcBef>
-              <a:spcAft>
-                <a:spcPts val="0"/>
-              </a:spcAft>
+              <a:lnSpc>
+                <a:spcPct val="100000"/>
+              </a:lnSpc>
+              <a:spcBef>
+                <a:spcPts val="0"/>
+              </a:spcBef>
+              <a:spcAft>
+                <a:spcPts val="0"/>
+              </a:spcAft>
+              <a:buClr>
+                <a:srgbClr val="000000"/>
+              </a:buClr>
               <a:buSzPts val="1400"/>
+              <a:buFont typeface="Arial"/>
               <a:buNone/>
               <a:defRPr b="0" i="0" sz="1200" u="none" cap="none" strike="noStrike">
                 <a:solidFill>
@@ -855,13 +1016,20 @@
               </a:defRPr>
             </a:lvl5pPr>
             <a:lvl6pPr indent="-228600" lvl="5" marL="2743200" marR="0" rtl="0" algn="l">
-              <a:spcBef>
-                <a:spcPts val="0"/>
-              </a:spcBef>
-              <a:spcAft>
-                <a:spcPts val="0"/>
-              </a:spcAft>
+              <a:lnSpc>
+                <a:spcPct val="100000"/>
+              </a:lnSpc>
+              <a:spcBef>
+                <a:spcPts val="0"/>
+              </a:spcBef>
+              <a:spcAft>
+                <a:spcPts val="0"/>
+              </a:spcAft>
+              <a:buClr>
+                <a:srgbClr val="000000"/>
+              </a:buClr>
               <a:buSzPts val="1400"/>
+              <a:buFont typeface="Arial"/>
               <a:buNone/>
               <a:defRPr b="0" i="0" sz="1200" u="none" cap="none" strike="noStrike">
                 <a:solidFill>
@@ -874,13 +1042,20 @@
               </a:defRPr>
             </a:lvl6pPr>
             <a:lvl7pPr indent="-228600" lvl="6" marL="3200400" marR="0" rtl="0" algn="l">
-              <a:spcBef>
-                <a:spcPts val="0"/>
-              </a:spcBef>
-              <a:spcAft>
-                <a:spcPts val="0"/>
-              </a:spcAft>
+              <a:lnSpc>
+                <a:spcPct val="100000"/>
+              </a:lnSpc>
+              <a:spcBef>
+                <a:spcPts val="0"/>
+              </a:spcBef>
+              <a:spcAft>
+                <a:spcPts val="0"/>
+              </a:spcAft>
+              <a:buClr>
+                <a:srgbClr val="000000"/>
+              </a:buClr>
               <a:buSzPts val="1400"/>
+              <a:buFont typeface="Arial"/>
               <a:buNone/>
               <a:defRPr b="0" i="0" sz="1200" u="none" cap="none" strike="noStrike">
                 <a:solidFill>
@@ -893,13 +1068,20 @@
               </a:defRPr>
             </a:lvl7pPr>
             <a:lvl8pPr indent="-228600" lvl="7" marL="3657600" marR="0" rtl="0" algn="l">
-              <a:spcBef>
-                <a:spcPts val="0"/>
-              </a:spcBef>
-              <a:spcAft>
-                <a:spcPts val="0"/>
-              </a:spcAft>
+              <a:lnSpc>
+                <a:spcPct val="100000"/>
+              </a:lnSpc>
+              <a:spcBef>
+                <a:spcPts val="0"/>
+              </a:spcBef>
+              <a:spcAft>
+                <a:spcPts val="0"/>
+              </a:spcAft>
+              <a:buClr>
+                <a:srgbClr val="000000"/>
+              </a:buClr>
               <a:buSzPts val="1400"/>
+              <a:buFont typeface="Arial"/>
               <a:buNone/>
               <a:defRPr b="0" i="0" sz="1200" u="none" cap="none" strike="noStrike">
                 <a:solidFill>
@@ -912,13 +1094,20 @@
               </a:defRPr>
             </a:lvl8pPr>
             <a:lvl9pPr indent="-228600" lvl="8" marL="4114800" marR="0" rtl="0" algn="l">
-              <a:spcBef>
-                <a:spcPts val="0"/>
-              </a:spcBef>
-              <a:spcAft>
-                <a:spcPts val="0"/>
-              </a:spcAft>
+              <a:lnSpc>
+                <a:spcPct val="100000"/>
+              </a:lnSpc>
+              <a:spcBef>
+                <a:spcPts val="0"/>
+              </a:spcBef>
+              <a:spcAft>
+                <a:spcPts val="0"/>
+              </a:spcAft>
+              <a:buClr>
+                <a:srgbClr val="000000"/>
+              </a:buClr>
               <a:buSzPts val="1400"/>
+              <a:buFont typeface="Arial"/>
               <a:buNone/>
               <a:defRPr b="0" i="0" sz="1200" u="none" cap="none" strike="noStrike">
                 <a:solidFill>
@@ -961,13 +1150,20 @@
           </a:bodyPr>
           <a:lstStyle>
             <a:lvl1pPr lvl="0" marR="0" rtl="0" algn="l">
-              <a:spcBef>
-                <a:spcPts val="0"/>
-              </a:spcBef>
-              <a:spcAft>
-                <a:spcPts val="0"/>
-              </a:spcAft>
+              <a:lnSpc>
+                <a:spcPct val="100000"/>
+              </a:lnSpc>
+              <a:spcBef>
+                <a:spcPts val="0"/>
+              </a:spcBef>
+              <a:spcAft>
+                <a:spcPts val="0"/>
+              </a:spcAft>
+              <a:buClr>
+                <a:srgbClr val="000000"/>
+              </a:buClr>
               <a:buSzPts val="1400"/>
+              <a:buFont typeface="Arial"/>
               <a:buNone/>
               <a:defRPr b="0" i="0" sz="1200" u="none" cap="none" strike="noStrike">
                 <a:solidFill>
@@ -980,13 +1176,20 @@
               </a:defRPr>
             </a:lvl1pPr>
             <a:lvl2pPr lvl="1" marR="0" rtl="0" algn="l">
-              <a:spcBef>
-                <a:spcPts val="0"/>
-              </a:spcBef>
-              <a:spcAft>
-                <a:spcPts val="0"/>
-              </a:spcAft>
+              <a:lnSpc>
+                <a:spcPct val="100000"/>
+              </a:lnSpc>
+              <a:spcBef>
+                <a:spcPts val="0"/>
+              </a:spcBef>
+              <a:spcAft>
+                <a:spcPts val="0"/>
+              </a:spcAft>
+              <a:buClr>
+                <a:srgbClr val="000000"/>
+              </a:buClr>
               <a:buSzPts val="1400"/>
+              <a:buFont typeface="Arial"/>
               <a:buNone/>
               <a:defRPr b="0" i="0" sz="1800" u="none" cap="none" strike="noStrike">
                 <a:solidFill>
@@ -999,13 +1202,20 @@
               </a:defRPr>
             </a:lvl2pPr>
             <a:lvl3pPr lvl="2" marR="0" rtl="0" algn="l">
-              <a:spcBef>
-                <a:spcPts val="0"/>
-              </a:spcBef>
-              <a:spcAft>
-                <a:spcPts val="0"/>
-              </a:spcAft>
+              <a:lnSpc>
+                <a:spcPct val="100000"/>
+              </a:lnSpc>
+              <a:spcBef>
+                <a:spcPts val="0"/>
+              </a:spcBef>
+              <a:spcAft>
+                <a:spcPts val="0"/>
+              </a:spcAft>
+              <a:buClr>
+                <a:srgbClr val="000000"/>
+              </a:buClr>
               <a:buSzPts val="1400"/>
+              <a:buFont typeface="Arial"/>
               <a:buNone/>
               <a:defRPr b="0" i="0" sz="1800" u="none" cap="none" strike="noStrike">
                 <a:solidFill>
@@ -1018,13 +1228,20 @@
               </a:defRPr>
             </a:lvl3pPr>
             <a:lvl4pPr lvl="3" marR="0" rtl="0" algn="l">
-              <a:spcBef>
-                <a:spcPts val="0"/>
-              </a:spcBef>
-              <a:spcAft>
-                <a:spcPts val="0"/>
-              </a:spcAft>
+              <a:lnSpc>
+                <a:spcPct val="100000"/>
+              </a:lnSpc>
+              <a:spcBef>
+                <a:spcPts val="0"/>
+              </a:spcBef>
+              <a:spcAft>
+                <a:spcPts val="0"/>
+              </a:spcAft>
+              <a:buClr>
+                <a:srgbClr val="000000"/>
+              </a:buClr>
               <a:buSzPts val="1400"/>
+              <a:buFont typeface="Arial"/>
               <a:buNone/>
               <a:defRPr b="0" i="0" sz="1800" u="none" cap="none" strike="noStrike">
                 <a:solidFill>
@@ -1037,13 +1254,20 @@
               </a:defRPr>
             </a:lvl4pPr>
             <a:lvl5pPr lvl="4" marR="0" rtl="0" algn="l">
-              <a:spcBef>
-                <a:spcPts val="0"/>
-              </a:spcBef>
-              <a:spcAft>
-                <a:spcPts val="0"/>
-              </a:spcAft>
+              <a:lnSpc>
+                <a:spcPct val="100000"/>
+              </a:lnSpc>
+              <a:spcBef>
+                <a:spcPts val="0"/>
+              </a:spcBef>
+              <a:spcAft>
+                <a:spcPts val="0"/>
+              </a:spcAft>
+              <a:buClr>
+                <a:srgbClr val="000000"/>
+              </a:buClr>
               <a:buSzPts val="1400"/>
+              <a:buFont typeface="Arial"/>
               <a:buNone/>
               <a:defRPr b="0" i="0" sz="1800" u="none" cap="none" strike="noStrike">
                 <a:solidFill>
@@ -1056,13 +1280,20 @@
               </a:defRPr>
             </a:lvl5pPr>
             <a:lvl6pPr lvl="5" marR="0" rtl="0" algn="l">
-              <a:spcBef>
-                <a:spcPts val="0"/>
-              </a:spcBef>
-              <a:spcAft>
-                <a:spcPts val="0"/>
-              </a:spcAft>
+              <a:lnSpc>
+                <a:spcPct val="100000"/>
+              </a:lnSpc>
+              <a:spcBef>
+                <a:spcPts val="0"/>
+              </a:spcBef>
+              <a:spcAft>
+                <a:spcPts val="0"/>
+              </a:spcAft>
+              <a:buClr>
+                <a:srgbClr val="000000"/>
+              </a:buClr>
               <a:buSzPts val="1400"/>
+              <a:buFont typeface="Arial"/>
               <a:buNone/>
               <a:defRPr b="0" i="0" sz="1800" u="none" cap="none" strike="noStrike">
                 <a:solidFill>
@@ -1075,13 +1306,20 @@
               </a:defRPr>
             </a:lvl6pPr>
             <a:lvl7pPr lvl="6" marR="0" rtl="0" algn="l">
-              <a:spcBef>
-                <a:spcPts val="0"/>
-              </a:spcBef>
-              <a:spcAft>
-                <a:spcPts val="0"/>
-              </a:spcAft>
+              <a:lnSpc>
+                <a:spcPct val="100000"/>
+              </a:lnSpc>
+              <a:spcBef>
+                <a:spcPts val="0"/>
+              </a:spcBef>
+              <a:spcAft>
+                <a:spcPts val="0"/>
+              </a:spcAft>
+              <a:buClr>
+                <a:srgbClr val="000000"/>
+              </a:buClr>
               <a:buSzPts val="1400"/>
+              <a:buFont typeface="Arial"/>
               <a:buNone/>
               <a:defRPr b="0" i="0" sz="1800" u="none" cap="none" strike="noStrike">
                 <a:solidFill>
@@ -1094,13 +1332,20 @@
               </a:defRPr>
             </a:lvl7pPr>
             <a:lvl8pPr lvl="7" marR="0" rtl="0" algn="l">
-              <a:spcBef>
-                <a:spcPts val="0"/>
-              </a:spcBef>
-              <a:spcAft>
-                <a:spcPts val="0"/>
-              </a:spcAft>
+              <a:lnSpc>
+                <a:spcPct val="100000"/>
+              </a:lnSpc>
+              <a:spcBef>
+                <a:spcPts val="0"/>
+              </a:spcBef>
+              <a:spcAft>
+                <a:spcPts val="0"/>
+              </a:spcAft>
+              <a:buClr>
+                <a:srgbClr val="000000"/>
+              </a:buClr>
               <a:buSzPts val="1400"/>
+              <a:buFont typeface="Arial"/>
               <a:buNone/>
               <a:defRPr b="0" i="0" sz="1800" u="none" cap="none" strike="noStrike">
                 <a:solidFill>
@@ -1113,13 +1358,20 @@
               </a:defRPr>
             </a:lvl8pPr>
             <a:lvl9pPr lvl="8" marR="0" rtl="0" algn="l">
-              <a:spcBef>
-                <a:spcPts val="0"/>
-              </a:spcBef>
-              <a:spcAft>
-                <a:spcPts val="0"/>
-              </a:spcAft>
+              <a:lnSpc>
+                <a:spcPct val="100000"/>
+              </a:lnSpc>
+              <a:spcBef>
+                <a:spcPts val="0"/>
+              </a:spcBef>
+              <a:spcAft>
+                <a:spcPts val="0"/>
+              </a:spcAft>
+              <a:buClr>
+                <a:srgbClr val="000000"/>
+              </a:buClr>
               <a:buSzPts val="1400"/>
+              <a:buFont typeface="Arial"/>
               <a:buNone/>
               <a:defRPr b="0" i="0" sz="1800" u="none" cap="none" strike="noStrike">
                 <a:solidFill>
@@ -1163,12 +1415,20 @@
           <a:lstStyle/>
           <a:p>
             <a:pPr indent="0" lvl="0" marL="0" marR="0" rtl="0" algn="r">
-              <a:spcBef>
-                <a:spcPts val="0"/>
-              </a:spcBef>
-              <a:spcAft>
-                <a:spcPts val="0"/>
-              </a:spcAft>
+              <a:lnSpc>
+                <a:spcPct val="100000"/>
+              </a:lnSpc>
+              <a:spcBef>
+                <a:spcPts val="0"/>
+              </a:spcBef>
+              <a:spcAft>
+                <a:spcPts val="0"/>
+              </a:spcAft>
+              <a:buClr>
+                <a:srgbClr val="000000"/>
+              </a:buClr>
+              <a:buSzPts val="1200"/>
+              <a:buFont typeface="Arial"/>
               <a:buNone/>
             </a:pPr>
             <a:fld id="{00000000-1234-1234-1234-123412341234}" type="slidenum">
@@ -1520,12 +1780,16 @@
           <a:lstStyle/>
           <a:p>
             <a:pPr indent="0" lvl="0" marL="0" rtl="0" algn="l">
-              <a:spcBef>
-                <a:spcPts val="0"/>
-              </a:spcBef>
-              <a:spcAft>
-                <a:spcPts val="0"/>
-              </a:spcAft>
+              <a:lnSpc>
+                <a:spcPct val="100000"/>
+              </a:lnSpc>
+              <a:spcBef>
+                <a:spcPts val="0"/>
+              </a:spcBef>
+              <a:spcAft>
+                <a:spcPts val="0"/>
+              </a:spcAft>
+              <a:buSzPts val="1400"/>
               <a:buNone/>
             </a:pPr>
             <a:r>
@@ -1563,12 +1827,16 @@
           <a:lstStyle/>
           <a:p>
             <a:pPr indent="0" lvl="0" marL="0" rtl="0" algn="r">
-              <a:spcBef>
-                <a:spcPts val="0"/>
-              </a:spcBef>
-              <a:spcAft>
-                <a:spcPts val="0"/>
-              </a:spcAft>
+              <a:lnSpc>
+                <a:spcPct val="100000"/>
+              </a:lnSpc>
+              <a:spcBef>
+                <a:spcPts val="0"/>
+              </a:spcBef>
+              <a:spcAft>
+                <a:spcPts val="0"/>
+              </a:spcAft>
+              <a:buSzPts val="1400"/>
               <a:buNone/>
             </a:pPr>
             <a:fld id="{00000000-1234-1234-1234-123412341234}" type="slidenum">
@@ -1677,12 +1945,16 @@
           <a:lstStyle/>
           <a:p>
             <a:pPr indent="0" lvl="0" marL="0" rtl="0" algn="l">
-              <a:spcBef>
-                <a:spcPts val="0"/>
-              </a:spcBef>
-              <a:spcAft>
-                <a:spcPts val="0"/>
-              </a:spcAft>
+              <a:lnSpc>
+                <a:spcPct val="100000"/>
+              </a:lnSpc>
+              <a:spcBef>
+                <a:spcPts val="0"/>
+              </a:spcBef>
+              <a:spcAft>
+                <a:spcPts val="0"/>
+              </a:spcAft>
+              <a:buSzPts val="1400"/>
               <a:buNone/>
             </a:pPr>
             <a:r>
@@ -1720,12 +1992,16 @@
           <a:lstStyle/>
           <a:p>
             <a:pPr indent="0" lvl="0" marL="0" rtl="0" algn="r">
-              <a:spcBef>
-                <a:spcPts val="0"/>
-              </a:spcBef>
-              <a:spcAft>
-                <a:spcPts val="0"/>
-              </a:spcAft>
+              <a:lnSpc>
+                <a:spcPct val="100000"/>
+              </a:lnSpc>
+              <a:spcBef>
+                <a:spcPts val="0"/>
+              </a:spcBef>
+              <a:spcAft>
+                <a:spcPts val="0"/>
+              </a:spcAft>
+              <a:buSzPts val="1400"/>
               <a:buNone/>
             </a:pPr>
             <a:fld id="{00000000-1234-1234-1234-123412341234}" type="slidenum">
@@ -1834,12 +2110,16 @@
           <a:lstStyle/>
           <a:p>
             <a:pPr indent="0" lvl="0" marL="0" rtl="0" algn="l">
-              <a:spcBef>
-                <a:spcPts val="0"/>
-              </a:spcBef>
-              <a:spcAft>
-                <a:spcPts val="0"/>
-              </a:spcAft>
+              <a:lnSpc>
+                <a:spcPct val="100000"/>
+              </a:lnSpc>
+              <a:spcBef>
+                <a:spcPts val="0"/>
+              </a:spcBef>
+              <a:spcAft>
+                <a:spcPts val="0"/>
+              </a:spcAft>
+              <a:buSzPts val="1400"/>
               <a:buNone/>
             </a:pPr>
             <a:r>
@@ -1877,12 +2157,16 @@
           <a:lstStyle/>
           <a:p>
             <a:pPr indent="0" lvl="0" marL="0" rtl="0" algn="r">
-              <a:spcBef>
-                <a:spcPts val="0"/>
-              </a:spcBef>
-              <a:spcAft>
-                <a:spcPts val="0"/>
-              </a:spcAft>
+              <a:lnSpc>
+                <a:spcPct val="100000"/>
+              </a:lnSpc>
+              <a:spcBef>
+                <a:spcPts val="0"/>
+              </a:spcBef>
+              <a:spcAft>
+                <a:spcPts val="0"/>
+              </a:spcAft>
+              <a:buSzPts val="1400"/>
               <a:buNone/>
             </a:pPr>
             <a:fld id="{00000000-1234-1234-1234-123412341234}" type="slidenum">
@@ -1991,12 +2275,16 @@
           <a:lstStyle/>
           <a:p>
             <a:pPr indent="0" lvl="0" marL="0" rtl="0" algn="l">
-              <a:spcBef>
-                <a:spcPts val="0"/>
-              </a:spcBef>
-              <a:spcAft>
-                <a:spcPts val="0"/>
-              </a:spcAft>
+              <a:lnSpc>
+                <a:spcPct val="100000"/>
+              </a:lnSpc>
+              <a:spcBef>
+                <a:spcPts val="0"/>
+              </a:spcBef>
+              <a:spcAft>
+                <a:spcPts val="0"/>
+              </a:spcAft>
+              <a:buSzPts val="1400"/>
               <a:buNone/>
             </a:pPr>
             <a:r>
@@ -2034,12 +2322,16 @@
           <a:lstStyle/>
           <a:p>
             <a:pPr indent="0" lvl="0" marL="0" rtl="0" algn="r">
-              <a:spcBef>
-                <a:spcPts val="0"/>
-              </a:spcBef>
-              <a:spcAft>
-                <a:spcPts val="0"/>
-              </a:spcAft>
+              <a:lnSpc>
+                <a:spcPct val="100000"/>
+              </a:lnSpc>
+              <a:spcBef>
+                <a:spcPts val="0"/>
+              </a:spcBef>
+              <a:spcAft>
+                <a:spcPts val="0"/>
+              </a:spcAft>
+              <a:buSzPts val="1400"/>
               <a:buNone/>
             </a:pPr>
             <a:fld id="{00000000-1234-1234-1234-123412341234}" type="slidenum">
@@ -2148,12 +2440,16 @@
           <a:lstStyle/>
           <a:p>
             <a:pPr indent="0" lvl="0" marL="0" rtl="0" algn="l">
-              <a:spcBef>
-                <a:spcPts val="0"/>
-              </a:spcBef>
-              <a:spcAft>
-                <a:spcPts val="0"/>
-              </a:spcAft>
+              <a:lnSpc>
+                <a:spcPct val="100000"/>
+              </a:lnSpc>
+              <a:spcBef>
+                <a:spcPts val="0"/>
+              </a:spcBef>
+              <a:spcAft>
+                <a:spcPts val="0"/>
+              </a:spcAft>
+              <a:buSzPts val="1400"/>
               <a:buNone/>
             </a:pPr>
             <a:r>
@@ -2191,12 +2487,16 @@
           <a:lstStyle/>
           <a:p>
             <a:pPr indent="0" lvl="0" marL="0" rtl="0" algn="r">
-              <a:spcBef>
-                <a:spcPts val="0"/>
-              </a:spcBef>
-              <a:spcAft>
-                <a:spcPts val="0"/>
-              </a:spcAft>
+              <a:lnSpc>
+                <a:spcPct val="100000"/>
+              </a:lnSpc>
+              <a:spcBef>
+                <a:spcPts val="0"/>
+              </a:spcBef>
+              <a:spcAft>
+                <a:spcPts val="0"/>
+              </a:spcAft>
+              <a:buSzPts val="1400"/>
               <a:buNone/>
             </a:pPr>
             <a:fld id="{00000000-1234-1234-1234-123412341234}" type="slidenum">
@@ -2305,12 +2605,16 @@
           <a:lstStyle/>
           <a:p>
             <a:pPr indent="0" lvl="0" marL="0" rtl="0" algn="l">
-              <a:spcBef>
-                <a:spcPts val="0"/>
-              </a:spcBef>
-              <a:spcAft>
-                <a:spcPts val="0"/>
-              </a:spcAft>
+              <a:lnSpc>
+                <a:spcPct val="100000"/>
+              </a:lnSpc>
+              <a:spcBef>
+                <a:spcPts val="0"/>
+              </a:spcBef>
+              <a:spcAft>
+                <a:spcPts val="0"/>
+              </a:spcAft>
+              <a:buSzPts val="1400"/>
               <a:buNone/>
             </a:pPr>
             <a:r>
@@ -2348,12 +2652,16 @@
           <a:lstStyle/>
           <a:p>
             <a:pPr indent="0" lvl="0" marL="0" rtl="0" algn="r">
-              <a:spcBef>
-                <a:spcPts val="0"/>
-              </a:spcBef>
-              <a:spcAft>
-                <a:spcPts val="0"/>
-              </a:spcAft>
+              <a:lnSpc>
+                <a:spcPct val="100000"/>
+              </a:lnSpc>
+              <a:spcBef>
+                <a:spcPts val="0"/>
+              </a:spcBef>
+              <a:spcAft>
+                <a:spcPts val="0"/>
+              </a:spcAft>
+              <a:buSzPts val="1400"/>
               <a:buNone/>
             </a:pPr>
             <a:fld id="{00000000-1234-1234-1234-123412341234}" type="slidenum">
@@ -2462,12 +2770,16 @@
           <a:lstStyle/>
           <a:p>
             <a:pPr indent="0" lvl="0" marL="0" rtl="0" algn="l">
-              <a:spcBef>
-                <a:spcPts val="0"/>
-              </a:spcBef>
-              <a:spcAft>
-                <a:spcPts val="0"/>
-              </a:spcAft>
+              <a:lnSpc>
+                <a:spcPct val="100000"/>
+              </a:lnSpc>
+              <a:spcBef>
+                <a:spcPts val="0"/>
+              </a:spcBef>
+              <a:spcAft>
+                <a:spcPts val="0"/>
+              </a:spcAft>
+              <a:buSzPts val="1400"/>
               <a:buNone/>
             </a:pPr>
             <a:r>
@@ -2505,12 +2817,16 @@
           <a:lstStyle/>
           <a:p>
             <a:pPr indent="0" lvl="0" marL="0" rtl="0" algn="r">
-              <a:spcBef>
-                <a:spcPts val="0"/>
-              </a:spcBef>
-              <a:spcAft>
-                <a:spcPts val="0"/>
-              </a:spcAft>
+              <a:lnSpc>
+                <a:spcPct val="100000"/>
+              </a:lnSpc>
+              <a:spcBef>
+                <a:spcPts val="0"/>
+              </a:spcBef>
+              <a:spcAft>
+                <a:spcPts val="0"/>
+              </a:spcAft>
+              <a:buSzPts val="1400"/>
               <a:buNone/>
             </a:pPr>
             <a:fld id="{00000000-1234-1234-1234-123412341234}" type="slidenum">
@@ -2619,12 +2935,16 @@
           <a:lstStyle/>
           <a:p>
             <a:pPr indent="0" lvl="0" marL="0" rtl="0" algn="l">
-              <a:spcBef>
-                <a:spcPts val="0"/>
-              </a:spcBef>
-              <a:spcAft>
-                <a:spcPts val="0"/>
-              </a:spcAft>
+              <a:lnSpc>
+                <a:spcPct val="100000"/>
+              </a:lnSpc>
+              <a:spcBef>
+                <a:spcPts val="0"/>
+              </a:spcBef>
+              <a:spcAft>
+                <a:spcPts val="0"/>
+              </a:spcAft>
+              <a:buSzPts val="1400"/>
               <a:buNone/>
             </a:pPr>
             <a:r>
@@ -2662,12 +2982,16 @@
           <a:lstStyle/>
           <a:p>
             <a:pPr indent="0" lvl="0" marL="0" rtl="0" algn="r">
-              <a:spcBef>
-                <a:spcPts val="0"/>
-              </a:spcBef>
-              <a:spcAft>
-                <a:spcPts val="0"/>
-              </a:spcAft>
+              <a:lnSpc>
+                <a:spcPct val="100000"/>
+              </a:lnSpc>
+              <a:spcBef>
+                <a:spcPts val="0"/>
+              </a:spcBef>
+              <a:spcAft>
+                <a:spcPts val="0"/>
+              </a:spcAft>
+              <a:buSzPts val="1400"/>
               <a:buNone/>
             </a:pPr>
             <a:fld id="{00000000-1234-1234-1234-123412341234}" type="slidenum">
@@ -2776,12 +3100,16 @@
           <a:lstStyle/>
           <a:p>
             <a:pPr indent="0" lvl="0" marL="0" rtl="0" algn="l">
-              <a:spcBef>
-                <a:spcPts val="0"/>
-              </a:spcBef>
-              <a:spcAft>
-                <a:spcPts val="0"/>
-              </a:spcAft>
+              <a:lnSpc>
+                <a:spcPct val="100000"/>
+              </a:lnSpc>
+              <a:spcBef>
+                <a:spcPts val="0"/>
+              </a:spcBef>
+              <a:spcAft>
+                <a:spcPts val="0"/>
+              </a:spcAft>
+              <a:buSzPts val="1400"/>
               <a:buNone/>
             </a:pPr>
             <a:r>
@@ -2819,12 +3147,16 @@
           <a:lstStyle/>
           <a:p>
             <a:pPr indent="0" lvl="0" marL="0" rtl="0" algn="r">
-              <a:spcBef>
-                <a:spcPts val="0"/>
-              </a:spcBef>
-              <a:spcAft>
-                <a:spcPts val="0"/>
-              </a:spcAft>
+              <a:lnSpc>
+                <a:spcPct val="100000"/>
+              </a:lnSpc>
+              <a:spcBef>
+                <a:spcPts val="0"/>
+              </a:spcBef>
+              <a:spcAft>
+                <a:spcPts val="0"/>
+              </a:spcAft>
+              <a:buSzPts val="1400"/>
               <a:buNone/>
             </a:pPr>
             <a:fld id="{00000000-1234-1234-1234-123412341234}" type="slidenum">
@@ -2933,12 +3265,16 @@
           <a:lstStyle/>
           <a:p>
             <a:pPr indent="0" lvl="0" marL="0" rtl="0" algn="l">
-              <a:spcBef>
-                <a:spcPts val="0"/>
-              </a:spcBef>
-              <a:spcAft>
-                <a:spcPts val="0"/>
-              </a:spcAft>
+              <a:lnSpc>
+                <a:spcPct val="100000"/>
+              </a:lnSpc>
+              <a:spcBef>
+                <a:spcPts val="0"/>
+              </a:spcBef>
+              <a:spcAft>
+                <a:spcPts val="0"/>
+              </a:spcAft>
+              <a:buSzPts val="1400"/>
               <a:buNone/>
             </a:pPr>
             <a:r>
@@ -2976,12 +3312,16 @@
           <a:lstStyle/>
           <a:p>
             <a:pPr indent="0" lvl="0" marL="0" rtl="0" algn="r">
-              <a:spcBef>
-                <a:spcPts val="0"/>
-              </a:spcBef>
-              <a:spcAft>
-                <a:spcPts val="0"/>
-              </a:spcAft>
+              <a:lnSpc>
+                <a:spcPct val="100000"/>
+              </a:lnSpc>
+              <a:spcBef>
+                <a:spcPts val="0"/>
+              </a:spcBef>
+              <a:spcAft>
+                <a:spcPts val="0"/>
+              </a:spcAft>
+              <a:buSzPts val="1400"/>
               <a:buNone/>
             </a:pPr>
             <a:fld id="{00000000-1234-1234-1234-123412341234}" type="slidenum">
@@ -3090,12 +3430,16 @@
           <a:lstStyle/>
           <a:p>
             <a:pPr indent="0" lvl="0" marL="0" rtl="0" algn="l">
-              <a:spcBef>
-                <a:spcPts val="0"/>
-              </a:spcBef>
-              <a:spcAft>
-                <a:spcPts val="0"/>
-              </a:spcAft>
+              <a:lnSpc>
+                <a:spcPct val="100000"/>
+              </a:lnSpc>
+              <a:spcBef>
+                <a:spcPts val="0"/>
+              </a:spcBef>
+              <a:spcAft>
+                <a:spcPts val="0"/>
+              </a:spcAft>
+              <a:buSzPts val="1400"/>
               <a:buNone/>
             </a:pPr>
             <a:r>
@@ -3133,12 +3477,16 @@
           <a:lstStyle/>
           <a:p>
             <a:pPr indent="0" lvl="0" marL="0" rtl="0" algn="r">
-              <a:spcBef>
-                <a:spcPts val="0"/>
-              </a:spcBef>
-              <a:spcAft>
-                <a:spcPts val="0"/>
-              </a:spcAft>
+              <a:lnSpc>
+                <a:spcPct val="100000"/>
+              </a:lnSpc>
+              <a:spcBef>
+                <a:spcPts val="0"/>
+              </a:spcBef>
+              <a:spcAft>
+                <a:spcPts val="0"/>
+              </a:spcAft>
+              <a:buSzPts val="1400"/>
               <a:buNone/>
             </a:pPr>
             <a:fld id="{00000000-1234-1234-1234-123412341234}" type="slidenum">
@@ -3247,12 +3595,16 @@
           <a:lstStyle/>
           <a:p>
             <a:pPr indent="0" lvl="0" marL="0" rtl="0" algn="l">
-              <a:spcBef>
-                <a:spcPts val="0"/>
-              </a:spcBef>
-              <a:spcAft>
-                <a:spcPts val="0"/>
-              </a:spcAft>
+              <a:lnSpc>
+                <a:spcPct val="100000"/>
+              </a:lnSpc>
+              <a:spcBef>
+                <a:spcPts val="0"/>
+              </a:spcBef>
+              <a:spcAft>
+                <a:spcPts val="0"/>
+              </a:spcAft>
+              <a:buSzPts val="1400"/>
               <a:buNone/>
             </a:pPr>
             <a:r>
@@ -3290,12 +3642,16 @@
           <a:lstStyle/>
           <a:p>
             <a:pPr indent="0" lvl="0" marL="0" rtl="0" algn="r">
-              <a:spcBef>
-                <a:spcPts val="0"/>
-              </a:spcBef>
-              <a:spcAft>
-                <a:spcPts val="0"/>
-              </a:spcAft>
+              <a:lnSpc>
+                <a:spcPct val="100000"/>
+              </a:lnSpc>
+              <a:spcBef>
+                <a:spcPts val="0"/>
+              </a:spcBef>
+              <a:spcAft>
+                <a:spcPts val="0"/>
+              </a:spcAft>
+              <a:buSzPts val="1400"/>
               <a:buNone/>
             </a:pPr>
             <a:fld id="{00000000-1234-1234-1234-123412341234}" type="slidenum">
@@ -4112,6 +4468,9 @@
           <a:lstStyle/>
           <a:p>
             <a:pPr indent="0" lvl="0" marL="0" marR="0" rtl="0" algn="l">
+              <a:lnSpc>
+                <a:spcPct val="100000"/>
+              </a:lnSpc>
               <a:spcBef>
                 <a:spcPts val="0"/>
               </a:spcBef>
@@ -4149,6 +4508,9 @@
           </a:p>
           <a:p>
             <a:pPr indent="0" lvl="0" marL="0" marR="0" rtl="0" algn="l">
+              <a:lnSpc>
+                <a:spcPct val="100000"/>
+              </a:lnSpc>
               <a:spcBef>
                 <a:spcPts val="0"/>
               </a:spcBef>
@@ -4212,6 +4574,9 @@
           <a:lstStyle/>
           <a:p>
             <a:pPr indent="0" lvl="0" marL="0" marR="0" rtl="0" algn="l">
+              <a:lnSpc>
+                <a:spcPct val="100000"/>
+              </a:lnSpc>
               <a:spcBef>
                 <a:spcPts val="0"/>
               </a:spcBef>
@@ -4275,6 +4640,9 @@
           <a:lstStyle/>
           <a:p>
             <a:pPr indent="0" lvl="0" marL="0" marR="0" rtl="0" algn="l">
+              <a:lnSpc>
+                <a:spcPct val="100000"/>
+              </a:lnSpc>
               <a:spcBef>
                 <a:spcPts val="0"/>
               </a:spcBef>
@@ -4338,6 +4706,9 @@
           <a:lstStyle/>
           <a:p>
             <a:pPr indent="0" lvl="0" marL="0" marR="0" rtl="0" algn="l">
+              <a:lnSpc>
+                <a:spcPct val="100000"/>
+              </a:lnSpc>
               <a:spcBef>
                 <a:spcPts val="0"/>
               </a:spcBef>
@@ -4429,6 +4800,9 @@
           <a:lstStyle/>
           <a:p>
             <a:pPr indent="0" lvl="0" marL="0" marR="0" rtl="0" algn="ctr">
+              <a:lnSpc>
+                <a:spcPct val="100000"/>
+              </a:lnSpc>
               <a:spcBef>
                 <a:spcPts val="0"/>
               </a:spcBef>
@@ -4492,6 +4866,9 @@
           <a:lstStyle/>
           <a:p>
             <a:pPr indent="0" lvl="0" marL="0" marR="0" rtl="0" algn="ctr">
+              <a:lnSpc>
+                <a:spcPct val="100000"/>
+              </a:lnSpc>
               <a:spcBef>
                 <a:spcPts val="0"/>
               </a:spcBef>
@@ -4581,6 +4958,9 @@
           <a:lstStyle/>
           <a:p>
             <a:pPr indent="0" lvl="0" marL="0" marR="0" rtl="0" algn="r">
+              <a:lnSpc>
+                <a:spcPct val="100000"/>
+              </a:lnSpc>
               <a:spcBef>
                 <a:spcPts val="0"/>
               </a:spcBef>
@@ -4676,6 +5056,9 @@
           <a:lstStyle/>
           <a:p>
             <a:pPr indent="0" lvl="0" marL="0" marR="0" rtl="0" algn="l">
+              <a:lnSpc>
+                <a:spcPct val="100000"/>
+              </a:lnSpc>
               <a:spcBef>
                 <a:spcPts val="0"/>
               </a:spcBef>
@@ -4739,6 +5122,9 @@
           <a:lstStyle/>
           <a:p>
             <a:pPr indent="0" lvl="0" marL="0" marR="0" rtl="0" algn="l">
+              <a:lnSpc>
+                <a:spcPct val="100000"/>
+              </a:lnSpc>
               <a:spcBef>
                 <a:spcPts val="0"/>
               </a:spcBef>
@@ -4802,6 +5188,9 @@
           <a:lstStyle/>
           <a:p>
             <a:pPr indent="0" lvl="0" marL="0" marR="0" rtl="0" algn="ctr">
+              <a:lnSpc>
+                <a:spcPct val="100000"/>
+              </a:lnSpc>
               <a:spcBef>
                 <a:spcPts val="0"/>
               </a:spcBef>
@@ -4865,6 +5254,9 @@
           <a:lstStyle/>
           <a:p>
             <a:pPr indent="0" lvl="0" marL="0" marR="0" rtl="0" algn="ctr">
+              <a:lnSpc>
+                <a:spcPct val="100000"/>
+              </a:lnSpc>
               <a:spcBef>
                 <a:spcPts val="0"/>
               </a:spcBef>
@@ -4928,6 +5320,9 @@
           <a:lstStyle/>
           <a:p>
             <a:pPr indent="0" lvl="0" marL="0" marR="0" rtl="0" algn="ctr">
+              <a:lnSpc>
+                <a:spcPct val="100000"/>
+              </a:lnSpc>
               <a:spcBef>
                 <a:spcPts val="0"/>
               </a:spcBef>
@@ -4991,6 +5386,9 @@
           <a:lstStyle/>
           <a:p>
             <a:pPr indent="0" lvl="0" marL="0" marR="0" rtl="0" algn="ctr">
+              <a:lnSpc>
+                <a:spcPct val="100000"/>
+              </a:lnSpc>
               <a:spcBef>
                 <a:spcPts val="0"/>
               </a:spcBef>
@@ -5054,6 +5452,9 @@
           <a:lstStyle/>
           <a:p>
             <a:pPr indent="0" lvl="0" marL="0" marR="0" rtl="0" algn="ctr">
+              <a:lnSpc>
+                <a:spcPct val="100000"/>
+              </a:lnSpc>
               <a:spcBef>
                 <a:spcPts val="0"/>
               </a:spcBef>
@@ -5117,6 +5518,9 @@
           <a:lstStyle/>
           <a:p>
             <a:pPr indent="0" lvl="0" marL="0" marR="0" rtl="0" algn="ctr">
+              <a:lnSpc>
+                <a:spcPct val="100000"/>
+              </a:lnSpc>
               <a:spcBef>
                 <a:spcPts val="0"/>
               </a:spcBef>
@@ -5187,7 +5591,10 @@
           </a:bodyPr>
           <a:lstStyle/>
           <a:p>
-            <a:pPr indent="0" lvl="0" marL="0" marR="0" rtl="0" algn="l">
+            <a:pPr indent="0" lvl="0" marL="0" marR="0" rtl="0" algn="ctr">
+              <a:lnSpc>
+                <a:spcPct val="100000"/>
+              </a:lnSpc>
               <a:spcBef>
                 <a:spcPts val="0"/>
               </a:spcBef>
@@ -5259,6 +5666,9 @@
           <a:lstStyle/>
           <a:p>
             <a:pPr indent="0" lvl="0" marL="0" marR="0" rtl="0" algn="ctr">
+              <a:lnSpc>
+                <a:spcPct val="100000"/>
+              </a:lnSpc>
               <a:spcBef>
                 <a:spcPts val="0"/>
               </a:spcBef>
@@ -5330,6 +5740,9 @@
           <a:lstStyle/>
           <a:p>
             <a:pPr indent="0" lvl="0" marL="0" marR="0" rtl="0" algn="ctr">
+              <a:lnSpc>
+                <a:spcPct val="100000"/>
+              </a:lnSpc>
               <a:spcBef>
                 <a:spcPts val="0"/>
               </a:spcBef>
@@ -5400,7 +5813,10 @@
           </a:bodyPr>
           <a:lstStyle/>
           <a:p>
-            <a:pPr indent="0" lvl="0" marL="0" marR="0" rtl="0" algn="l">
+            <a:pPr indent="0" lvl="0" marL="0" marR="0" rtl="0" algn="ctr">
+              <a:lnSpc>
+                <a:spcPct val="100000"/>
+              </a:lnSpc>
               <a:spcBef>
                 <a:spcPts val="0"/>
               </a:spcBef>
@@ -5472,6 +5888,9 @@
           <a:lstStyle/>
           <a:p>
             <a:pPr indent="0" lvl="0" marL="0" marR="0" rtl="0" algn="ctr">
+              <a:lnSpc>
+                <a:spcPct val="100000"/>
+              </a:lnSpc>
               <a:spcBef>
                 <a:spcPts val="0"/>
               </a:spcBef>
@@ -5543,6 +5962,9 @@
           <a:lstStyle/>
           <a:p>
             <a:pPr indent="0" lvl="0" marL="0" marR="0" rtl="0" algn="ctr">
+              <a:lnSpc>
+                <a:spcPct val="100000"/>
+              </a:lnSpc>
               <a:spcBef>
                 <a:spcPts val="0"/>
               </a:spcBef>
@@ -5613,7 +6035,10 @@
           </a:bodyPr>
           <a:lstStyle/>
           <a:p>
-            <a:pPr indent="0" lvl="0" marL="0" marR="0" rtl="0" algn="l">
+            <a:pPr indent="0" lvl="0" marL="0" marR="0" rtl="0" algn="ctr">
+              <a:lnSpc>
+                <a:spcPct val="100000"/>
+              </a:lnSpc>
               <a:spcBef>
                 <a:spcPts val="0"/>
               </a:spcBef>
@@ -5685,6 +6110,9 @@
           <a:lstStyle/>
           <a:p>
             <a:pPr indent="0" lvl="0" marL="0" marR="0" rtl="0" algn="ctr">
+              <a:lnSpc>
+                <a:spcPct val="100000"/>
+              </a:lnSpc>
               <a:spcBef>
                 <a:spcPts val="0"/>
               </a:spcBef>
@@ -5756,6 +6184,9 @@
           <a:lstStyle/>
           <a:p>
             <a:pPr indent="0" lvl="0" marL="0" marR="0" rtl="0" algn="ctr">
+              <a:lnSpc>
+                <a:spcPct val="100000"/>
+              </a:lnSpc>
               <a:spcBef>
                 <a:spcPts val="0"/>
               </a:spcBef>
@@ -5826,7 +6257,10 @@
           </a:bodyPr>
           <a:lstStyle/>
           <a:p>
-            <a:pPr indent="0" lvl="0" marL="0" marR="0" rtl="0" algn="l">
+            <a:pPr indent="0" lvl="0" marL="0" marR="0" rtl="0" algn="ctr">
+              <a:lnSpc>
+                <a:spcPct val="100000"/>
+              </a:lnSpc>
               <a:spcBef>
                 <a:spcPts val="0"/>
               </a:spcBef>
@@ -5898,6 +6332,9 @@
           <a:lstStyle/>
           <a:p>
             <a:pPr indent="0" lvl="0" marL="0" marR="0" rtl="0" algn="ctr">
+              <a:lnSpc>
+                <a:spcPct val="100000"/>
+              </a:lnSpc>
               <a:spcBef>
                 <a:spcPts val="0"/>
               </a:spcBef>
@@ -5969,6 +6406,9 @@
           <a:lstStyle/>
           <a:p>
             <a:pPr indent="0" lvl="0" marL="0" marR="0" rtl="0" algn="ctr">
+              <a:lnSpc>
+                <a:spcPct val="100000"/>
+              </a:lnSpc>
               <a:spcBef>
                 <a:spcPts val="0"/>
               </a:spcBef>
@@ -6059,6 +6499,9 @@
           <a:lstStyle/>
           <a:p>
             <a:pPr indent="0" lvl="0" marL="0" marR="0" rtl="0" algn="l">
+              <a:lnSpc>
+                <a:spcPct val="100000"/>
+              </a:lnSpc>
               <a:spcBef>
                 <a:spcPts val="0"/>
               </a:spcBef>
@@ -6148,6 +6591,9 @@
           <a:lstStyle/>
           <a:p>
             <a:pPr indent="0" lvl="0" marL="0" marR="0" rtl="0" algn="r">
+              <a:lnSpc>
+                <a:spcPct val="100000"/>
+              </a:lnSpc>
               <a:spcBef>
                 <a:spcPts val="0"/>
               </a:spcBef>
@@ -6243,6 +6689,9 @@
           <a:lstStyle/>
           <a:p>
             <a:pPr indent="0" lvl="0" marL="0" marR="0" rtl="0" algn="l">
+              <a:lnSpc>
+                <a:spcPct val="100000"/>
+              </a:lnSpc>
               <a:spcBef>
                 <a:spcPts val="0"/>
               </a:spcBef>
@@ -6306,6 +6755,9 @@
           <a:lstStyle/>
           <a:p>
             <a:pPr indent="0" lvl="0" marL="0" marR="0" rtl="0" algn="l">
+              <a:lnSpc>
+                <a:spcPct val="100000"/>
+              </a:lnSpc>
               <a:spcBef>
                 <a:spcPts val="0"/>
               </a:spcBef>
@@ -6376,7 +6828,10 @@
           </a:bodyPr>
           <a:lstStyle/>
           <a:p>
-            <a:pPr indent="0" lvl="0" marL="0" marR="0" rtl="0" algn="l">
+            <a:pPr indent="0" lvl="0" marL="0" marR="0" rtl="0" algn="ctr">
+              <a:lnSpc>
+                <a:spcPct val="100000"/>
+              </a:lnSpc>
               <a:spcBef>
                 <a:spcPts val="0"/>
               </a:spcBef>
@@ -6448,6 +6903,9 @@
           <a:lstStyle/>
           <a:p>
             <a:pPr indent="0" lvl="0" marL="0" marR="0" rtl="0" algn="ctr">
+              <a:lnSpc>
+                <a:spcPct val="100000"/>
+              </a:lnSpc>
               <a:spcBef>
                 <a:spcPts val="0"/>
               </a:spcBef>
@@ -6519,6 +6977,9 @@
           <a:lstStyle/>
           <a:p>
             <a:pPr indent="0" lvl="0" marL="0" marR="0" rtl="0" algn="ctr">
+              <a:lnSpc>
+                <a:spcPct val="100000"/>
+              </a:lnSpc>
               <a:spcBef>
                 <a:spcPts val="0"/>
               </a:spcBef>
@@ -6589,7 +7050,10 @@
           </a:bodyPr>
           <a:lstStyle/>
           <a:p>
-            <a:pPr indent="0" lvl="0" marL="0" marR="0" rtl="0" algn="l">
+            <a:pPr indent="0" lvl="0" marL="0" marR="0" rtl="0" algn="ctr">
+              <a:lnSpc>
+                <a:spcPct val="100000"/>
+              </a:lnSpc>
               <a:spcBef>
                 <a:spcPts val="0"/>
               </a:spcBef>
@@ -6661,6 +7125,9 @@
           <a:lstStyle/>
           <a:p>
             <a:pPr indent="0" lvl="0" marL="0" marR="0" rtl="0" algn="ctr">
+              <a:lnSpc>
+                <a:spcPct val="100000"/>
+              </a:lnSpc>
               <a:spcBef>
                 <a:spcPts val="0"/>
               </a:spcBef>
@@ -6732,6 +7199,9 @@
           <a:lstStyle/>
           <a:p>
             <a:pPr indent="0" lvl="0" marL="0" marR="0" rtl="0" algn="ctr">
+              <a:lnSpc>
+                <a:spcPct val="100000"/>
+              </a:lnSpc>
               <a:spcBef>
                 <a:spcPts val="0"/>
               </a:spcBef>
@@ -6802,7 +7272,10 @@
           </a:bodyPr>
           <a:lstStyle/>
           <a:p>
-            <a:pPr indent="0" lvl="0" marL="0" marR="0" rtl="0" algn="l">
+            <a:pPr indent="0" lvl="0" marL="0" marR="0" rtl="0" algn="ctr">
+              <a:lnSpc>
+                <a:spcPct val="100000"/>
+              </a:lnSpc>
               <a:spcBef>
                 <a:spcPts val="0"/>
               </a:spcBef>
@@ -6874,6 +7347,9 @@
           <a:lstStyle/>
           <a:p>
             <a:pPr indent="0" lvl="0" marL="0" marR="0" rtl="0" algn="ctr">
+              <a:lnSpc>
+                <a:spcPct val="100000"/>
+              </a:lnSpc>
               <a:spcBef>
                 <a:spcPts val="0"/>
               </a:spcBef>
@@ -6945,6 +7421,9 @@
           <a:lstStyle/>
           <a:p>
             <a:pPr indent="0" lvl="0" marL="0" marR="0" rtl="0" algn="ctr">
+              <a:lnSpc>
+                <a:spcPct val="100000"/>
+              </a:lnSpc>
               <a:spcBef>
                 <a:spcPts val="0"/>
               </a:spcBef>
@@ -7015,7 +7494,10 @@
           </a:bodyPr>
           <a:lstStyle/>
           <a:p>
-            <a:pPr indent="0" lvl="0" marL="0" marR="0" rtl="0" algn="l">
+            <a:pPr indent="0" lvl="0" marL="0" marR="0" rtl="0" algn="ctr">
+              <a:lnSpc>
+                <a:spcPct val="100000"/>
+              </a:lnSpc>
               <a:spcBef>
                 <a:spcPts val="0"/>
               </a:spcBef>
@@ -7087,6 +7569,9 @@
           <a:lstStyle/>
           <a:p>
             <a:pPr indent="0" lvl="0" marL="0" marR="0" rtl="0" algn="ctr">
+              <a:lnSpc>
+                <a:spcPct val="100000"/>
+              </a:lnSpc>
               <a:spcBef>
                 <a:spcPts val="0"/>
               </a:spcBef>
@@ -7158,6 +7643,9 @@
           <a:lstStyle/>
           <a:p>
             <a:pPr indent="0" lvl="0" marL="0" marR="0" rtl="0" algn="ctr">
+              <a:lnSpc>
+                <a:spcPct val="100000"/>
+              </a:lnSpc>
               <a:spcBef>
                 <a:spcPts val="0"/>
               </a:spcBef>
@@ -7229,6 +7717,9 @@
           <a:lstStyle/>
           <a:p>
             <a:pPr indent="0" lvl="0" marL="0" marR="0" rtl="0" algn="ctr">
+              <a:lnSpc>
+                <a:spcPct val="100000"/>
+              </a:lnSpc>
               <a:spcBef>
                 <a:spcPts val="0"/>
               </a:spcBef>
@@ -7299,7 +7790,10 @@
           </a:bodyPr>
           <a:lstStyle/>
           <a:p>
-            <a:pPr indent="0" lvl="0" marL="0" marR="0" rtl="0" algn="l">
+            <a:pPr indent="0" lvl="0" marL="0" marR="0" rtl="0" algn="ctr">
+              <a:lnSpc>
+                <a:spcPct val="100000"/>
+              </a:lnSpc>
               <a:spcBef>
                 <a:spcPts val="0"/>
               </a:spcBef>
@@ -7371,6 +7865,9 @@
           <a:lstStyle/>
           <a:p>
             <a:pPr indent="0" lvl="0" marL="0" marR="0" rtl="0" algn="ctr">
+              <a:lnSpc>
+                <a:spcPct val="100000"/>
+              </a:lnSpc>
               <a:spcBef>
                 <a:spcPts val="0"/>
               </a:spcBef>
@@ -7442,6 +7939,9 @@
           <a:lstStyle/>
           <a:p>
             <a:pPr indent="0" lvl="0" marL="0" marR="0" rtl="0" algn="ctr">
+              <a:lnSpc>
+                <a:spcPct val="100000"/>
+              </a:lnSpc>
               <a:spcBef>
                 <a:spcPts val="0"/>
               </a:spcBef>
@@ -7513,6 +8013,9 @@
           <a:lstStyle/>
           <a:p>
             <a:pPr indent="0" lvl="0" marL="0" marR="0" rtl="0" algn="ctr">
+              <a:lnSpc>
+                <a:spcPct val="100000"/>
+              </a:lnSpc>
               <a:spcBef>
                 <a:spcPts val="0"/>
               </a:spcBef>
@@ -7583,7 +8086,10 @@
           </a:bodyPr>
           <a:lstStyle/>
           <a:p>
-            <a:pPr indent="0" lvl="0" marL="0" marR="0" rtl="0" algn="l">
+            <a:pPr indent="0" lvl="0" marL="0" marR="0" rtl="0" algn="ctr">
+              <a:lnSpc>
+                <a:spcPct val="100000"/>
+              </a:lnSpc>
               <a:spcBef>
                 <a:spcPts val="0"/>
               </a:spcBef>
@@ -7655,6 +8161,9 @@
           <a:lstStyle/>
           <a:p>
             <a:pPr indent="0" lvl="0" marL="0" marR="0" rtl="0" algn="ctr">
+              <a:lnSpc>
+                <a:spcPct val="100000"/>
+              </a:lnSpc>
               <a:spcBef>
                 <a:spcPts val="0"/>
               </a:spcBef>
@@ -7726,6 +8235,9 @@
           <a:lstStyle/>
           <a:p>
             <a:pPr indent="0" lvl="0" marL="0" marR="0" rtl="0" algn="ctr">
+              <a:lnSpc>
+                <a:spcPct val="100000"/>
+              </a:lnSpc>
               <a:spcBef>
                 <a:spcPts val="0"/>
               </a:spcBef>
@@ -7797,6 +8309,9 @@
           <a:lstStyle/>
           <a:p>
             <a:pPr indent="0" lvl="0" marL="0" marR="0" rtl="0" algn="ctr">
+              <a:lnSpc>
+                <a:spcPct val="100000"/>
+              </a:lnSpc>
               <a:spcBef>
                 <a:spcPts val="0"/>
               </a:spcBef>
@@ -7867,7 +8382,10 @@
           </a:bodyPr>
           <a:lstStyle/>
           <a:p>
-            <a:pPr indent="0" lvl="0" marL="0" marR="0" rtl="0" algn="l">
+            <a:pPr indent="0" lvl="0" marL="0" marR="0" rtl="0" algn="ctr">
+              <a:lnSpc>
+                <a:spcPct val="100000"/>
+              </a:lnSpc>
               <a:spcBef>
                 <a:spcPts val="0"/>
               </a:spcBef>
@@ -7939,6 +8457,9 @@
           <a:lstStyle/>
           <a:p>
             <a:pPr indent="0" lvl="0" marL="0" marR="0" rtl="0" algn="ctr">
+              <a:lnSpc>
+                <a:spcPct val="100000"/>
+              </a:lnSpc>
               <a:spcBef>
                 <a:spcPts val="0"/>
               </a:spcBef>
@@ -8010,6 +8531,9 @@
           <a:lstStyle/>
           <a:p>
             <a:pPr indent="0" lvl="0" marL="0" marR="0" rtl="0" algn="ctr">
+              <a:lnSpc>
+                <a:spcPct val="100000"/>
+              </a:lnSpc>
               <a:spcBef>
                 <a:spcPts val="0"/>
               </a:spcBef>
@@ -8081,6 +8605,9 @@
           <a:lstStyle/>
           <a:p>
             <a:pPr indent="0" lvl="0" marL="0" marR="0" rtl="0" algn="ctr">
+              <a:lnSpc>
+                <a:spcPct val="100000"/>
+              </a:lnSpc>
               <a:spcBef>
                 <a:spcPts val="0"/>
               </a:spcBef>
@@ -8144,6 +8671,9 @@
           <a:lstStyle/>
           <a:p>
             <a:pPr indent="0" lvl="0" marL="0" marR="0" rtl="0" algn="l">
+              <a:lnSpc>
+                <a:spcPct val="100000"/>
+              </a:lnSpc>
               <a:spcBef>
                 <a:spcPts val="0"/>
               </a:spcBef>
@@ -8207,6 +8737,9 @@
           <a:lstStyle/>
           <a:p>
             <a:pPr indent="0" lvl="0" marL="0" marR="0" rtl="0" algn="l">
+              <a:lnSpc>
+                <a:spcPct val="100000"/>
+              </a:lnSpc>
               <a:spcBef>
                 <a:spcPts val="0"/>
               </a:spcBef>
@@ -8277,7 +8810,10 @@
           </a:bodyPr>
           <a:lstStyle/>
           <a:p>
-            <a:pPr indent="0" lvl="0" marL="0" marR="0" rtl="0" algn="l">
+            <a:pPr indent="0" lvl="0" marL="0" marR="0" rtl="0" algn="ctr">
+              <a:lnSpc>
+                <a:spcPct val="100000"/>
+              </a:lnSpc>
               <a:spcBef>
                 <a:spcPts val="0"/>
               </a:spcBef>
@@ -8349,6 +8885,9 @@
           <a:lstStyle/>
           <a:p>
             <a:pPr indent="0" lvl="0" marL="0" marR="0" rtl="0" algn="ctr">
+              <a:lnSpc>
+                <a:spcPct val="100000"/>
+              </a:lnSpc>
               <a:spcBef>
                 <a:spcPts val="0"/>
               </a:spcBef>
@@ -8420,6 +8959,9 @@
           <a:lstStyle/>
           <a:p>
             <a:pPr indent="0" lvl="0" marL="0" marR="0" rtl="0" algn="ctr">
+              <a:lnSpc>
+                <a:spcPct val="100000"/>
+              </a:lnSpc>
               <a:spcBef>
                 <a:spcPts val="0"/>
               </a:spcBef>
@@ -8491,6 +9033,9 @@
           <a:lstStyle/>
           <a:p>
             <a:pPr indent="0" lvl="0" marL="0" marR="0" rtl="0" algn="ctr">
+              <a:lnSpc>
+                <a:spcPct val="100000"/>
+              </a:lnSpc>
               <a:spcBef>
                 <a:spcPts val="0"/>
               </a:spcBef>
@@ -8561,7 +9106,10 @@
           </a:bodyPr>
           <a:lstStyle/>
           <a:p>
-            <a:pPr indent="0" lvl="0" marL="0" marR="0" rtl="0" algn="l">
+            <a:pPr indent="0" lvl="0" marL="0" marR="0" rtl="0" algn="ctr">
+              <a:lnSpc>
+                <a:spcPct val="100000"/>
+              </a:lnSpc>
               <a:spcBef>
                 <a:spcPts val="0"/>
               </a:spcBef>
@@ -8633,6 +9181,9 @@
           <a:lstStyle/>
           <a:p>
             <a:pPr indent="0" lvl="0" marL="0" marR="0" rtl="0" algn="ctr">
+              <a:lnSpc>
+                <a:spcPct val="100000"/>
+              </a:lnSpc>
               <a:spcBef>
                 <a:spcPts val="0"/>
               </a:spcBef>
@@ -8704,6 +9255,9 @@
           <a:lstStyle/>
           <a:p>
             <a:pPr indent="0" lvl="0" marL="0" marR="0" rtl="0" algn="ctr">
+              <a:lnSpc>
+                <a:spcPct val="100000"/>
+              </a:lnSpc>
               <a:spcBef>
                 <a:spcPts val="0"/>
               </a:spcBef>
@@ -8775,6 +9329,9 @@
           <a:lstStyle/>
           <a:p>
             <a:pPr indent="0" lvl="0" marL="0" marR="0" rtl="0" algn="ctr">
+              <a:lnSpc>
+                <a:spcPct val="100000"/>
+              </a:lnSpc>
               <a:spcBef>
                 <a:spcPts val="0"/>
               </a:spcBef>
@@ -8845,7 +9402,10 @@
           </a:bodyPr>
           <a:lstStyle/>
           <a:p>
-            <a:pPr indent="0" lvl="0" marL="0" marR="0" rtl="0" algn="l">
+            <a:pPr indent="0" lvl="0" marL="0" marR="0" rtl="0" algn="ctr">
+              <a:lnSpc>
+                <a:spcPct val="100000"/>
+              </a:lnSpc>
               <a:spcBef>
                 <a:spcPts val="0"/>
               </a:spcBef>
@@ -8917,6 +9477,9 @@
           <a:lstStyle/>
           <a:p>
             <a:pPr indent="0" lvl="0" marL="0" marR="0" rtl="0" algn="ctr">
+              <a:lnSpc>
+                <a:spcPct val="100000"/>
+              </a:lnSpc>
               <a:spcBef>
                 <a:spcPts val="0"/>
               </a:spcBef>
@@ -8988,6 +9551,9 @@
           <a:lstStyle/>
           <a:p>
             <a:pPr indent="0" lvl="0" marL="0" marR="0" rtl="0" algn="ctr">
+              <a:lnSpc>
+                <a:spcPct val="100000"/>
+              </a:lnSpc>
               <a:spcBef>
                 <a:spcPts val="0"/>
               </a:spcBef>
@@ -9059,6 +9625,9 @@
           <a:lstStyle/>
           <a:p>
             <a:pPr indent="0" lvl="0" marL="0" marR="0" rtl="0" algn="ctr">
+              <a:lnSpc>
+                <a:spcPct val="100000"/>
+              </a:lnSpc>
               <a:spcBef>
                 <a:spcPts val="0"/>
               </a:spcBef>
@@ -9122,6 +9691,9 @@
           <a:lstStyle/>
           <a:p>
             <a:pPr indent="0" lvl="0" marL="0" marR="0" rtl="0" algn="l">
+              <a:lnSpc>
+                <a:spcPct val="100000"/>
+              </a:lnSpc>
               <a:spcBef>
                 <a:spcPts val="0"/>
               </a:spcBef>
@@ -9211,6 +9783,9 @@
           <a:lstStyle/>
           <a:p>
             <a:pPr indent="0" lvl="0" marL="0" marR="0" rtl="0" algn="r">
+              <a:lnSpc>
+                <a:spcPct val="100000"/>
+              </a:lnSpc>
               <a:spcBef>
                 <a:spcPts val="0"/>
               </a:spcBef>
@@ -9306,6 +9881,9 @@
           <a:lstStyle/>
           <a:p>
             <a:pPr indent="0" lvl="0" marL="0" marR="0" rtl="0" algn="l">
+              <a:lnSpc>
+                <a:spcPct val="100000"/>
+              </a:lnSpc>
               <a:spcBef>
                 <a:spcPts val="0"/>
               </a:spcBef>
@@ -9329,7 +9907,31 @@
                 <a:cs typeface="Play"/>
                 <a:sym typeface="Play"/>
               </a:rPr>
-              <a:t>Conclusions and Future Work</a:t>
+              <a:t>Conclusions</a:t>
+            </a:r>
+            <a:r>
+              <a:rPr b="1" lang="en-US" sz="3100">
+                <a:solidFill>
+                  <a:srgbClr val="007B8A"/>
+                </a:solidFill>
+                <a:latin typeface="Play"/>
+                <a:ea typeface="Play"/>
+                <a:cs typeface="Play"/>
+                <a:sym typeface="Play"/>
+              </a:rPr>
+              <a:t>, Limitations and </a:t>
+            </a:r>
+            <a:r>
+              <a:rPr b="1" i="0" lang="en-US" sz="3100" u="none" cap="none" strike="noStrike">
+                <a:solidFill>
+                  <a:srgbClr val="007B8A"/>
+                </a:solidFill>
+                <a:latin typeface="Play"/>
+                <a:ea typeface="Play"/>
+                <a:cs typeface="Play"/>
+                <a:sym typeface="Play"/>
+              </a:rPr>
+              <a:t>Future Work</a:t>
             </a:r>
             <a:endParaRPr b="0" i="0" sz="3100" u="none" cap="none" strike="noStrike">
               <a:solidFill>
@@ -9352,7 +9954,7 @@
         <p:spPr>
           <a:xfrm>
             <a:off x="548640" y="868680"/>
-            <a:ext cx="10424160" cy="256032"/>
+            <a:ext cx="10424100" cy="255900"/>
           </a:xfrm>
           <a:prstGeom prst="rect">
             <a:avLst/>
@@ -9369,6 +9971,9 @@
           <a:lstStyle/>
           <a:p>
             <a:pPr indent="0" lvl="0" marL="0" marR="0" rtl="0" algn="l">
+              <a:lnSpc>
+                <a:spcPct val="100000"/>
+              </a:lnSpc>
               <a:spcBef>
                 <a:spcPts val="0"/>
               </a:spcBef>
@@ -9440,6 +10045,9 @@
           <a:lstStyle/>
           <a:p>
             <a:pPr indent="0" lvl="0" marL="0" marR="0" rtl="0" algn="ctr">
+              <a:lnSpc>
+                <a:spcPct val="100000"/>
+              </a:lnSpc>
               <a:spcBef>
                 <a:spcPts val="0"/>
               </a:spcBef>
@@ -9503,6 +10111,9 @@
           <a:lstStyle/>
           <a:p>
             <a:pPr indent="0" lvl="0" marL="0" marR="0" rtl="0" algn="l">
+              <a:lnSpc>
+                <a:spcPct val="100000"/>
+              </a:lnSpc>
               <a:spcBef>
                 <a:spcPts val="0"/>
               </a:spcBef>
@@ -9540,6 +10151,9 @@
           </a:p>
           <a:p>
             <a:pPr indent="0" lvl="0" marL="0" marR="0" rtl="0" algn="l">
+              <a:lnSpc>
+                <a:spcPct val="100000"/>
+              </a:lnSpc>
               <a:spcBef>
                 <a:spcPts val="0"/>
               </a:spcBef>
@@ -9577,6 +10191,9 @@
           </a:p>
           <a:p>
             <a:pPr indent="0" lvl="0" marL="0" marR="0" rtl="0" algn="l">
+              <a:lnSpc>
+                <a:spcPct val="100000"/>
+              </a:lnSpc>
               <a:spcBef>
                 <a:spcPts val="0"/>
               </a:spcBef>
@@ -9614,6 +10231,9 @@
           </a:p>
           <a:p>
             <a:pPr indent="0" lvl="0" marL="0" marR="0" rtl="0" algn="l">
+              <a:lnSpc>
+                <a:spcPct val="100000"/>
+              </a:lnSpc>
               <a:spcBef>
                 <a:spcPts val="0"/>
               </a:spcBef>
@@ -9685,6 +10305,9 @@
           <a:lstStyle/>
           <a:p>
             <a:pPr indent="0" lvl="0" marL="0" marR="0" rtl="0" algn="ctr">
+              <a:lnSpc>
+                <a:spcPct val="100000"/>
+              </a:lnSpc>
               <a:spcBef>
                 <a:spcPts val="0"/>
               </a:spcBef>
@@ -9698,6 +10321,14 @@
               <a:buFont typeface="Arial"/>
               <a:buNone/>
             </a:pPr>
+            <a:r>
+              <a:rPr b="1" lang="en-US" sz="1200">
+                <a:solidFill>
+                  <a:srgbClr val="FFFFFF"/>
+                </a:solidFill>
+              </a:rPr>
+              <a:t>Limitations and </a:t>
+            </a:r>
             <a:r>
               <a:rPr b="1" i="0" lang="en-US" sz="1200" u="none" cap="none" strike="noStrike">
                 <a:solidFill>
@@ -9748,6 +10379,9 @@
           <a:lstStyle/>
           <a:p>
             <a:pPr indent="0" lvl="0" marL="0" marR="0" rtl="0" algn="l">
+              <a:lnSpc>
+                <a:spcPct val="100000"/>
+              </a:lnSpc>
               <a:spcBef>
                 <a:spcPts val="0"/>
               </a:spcBef>
@@ -9785,6 +10419,9 @@
           </a:p>
           <a:p>
             <a:pPr indent="0" lvl="0" marL="0" marR="0" rtl="0" algn="l">
+              <a:lnSpc>
+                <a:spcPct val="100000"/>
+              </a:lnSpc>
               <a:spcBef>
                 <a:spcPts val="0"/>
               </a:spcBef>
@@ -9822,6 +10459,9 @@
           </a:p>
           <a:p>
             <a:pPr indent="0" lvl="0" marL="0" marR="0" rtl="0" algn="l">
+              <a:lnSpc>
+                <a:spcPct val="100000"/>
+              </a:lnSpc>
               <a:spcBef>
                 <a:spcPts val="0"/>
               </a:spcBef>
@@ -9859,6 +10499,9 @@
           </a:p>
           <a:p>
             <a:pPr indent="0" lvl="0" marL="0" marR="0" rtl="0" algn="l">
+              <a:lnSpc>
+                <a:spcPct val="100000"/>
+              </a:lnSpc>
               <a:spcBef>
                 <a:spcPts val="0"/>
               </a:spcBef>
@@ -9885,132 +10528,6 @@
               <a:t>• Make artifact-aware training fully reproducible</a:t>
             </a:r>
             <a:endParaRPr b="0" i="0" sz="1700" u="none" cap="none" strike="noStrike">
-              <a:solidFill>
-                <a:schemeClr val="dk1"/>
-              </a:solidFill>
-              <a:latin typeface="Arial"/>
-              <a:ea typeface="Arial"/>
-              <a:cs typeface="Arial"/>
-              <a:sym typeface="Arial"/>
-            </a:endParaRPr>
-          </a:p>
-        </p:txBody>
-      </p:sp>
-      <p:sp>
-        <p:nvSpPr>
-          <p:cNvPr id="320" name="Google Shape;320;p14"/>
-          <p:cNvSpPr/>
-          <p:nvPr/>
-        </p:nvSpPr>
-        <p:spPr>
-          <a:xfrm>
-            <a:off x="777240" y="4343400"/>
-            <a:ext cx="1371600" cy="228600"/>
-          </a:xfrm>
-          <a:prstGeom prst="rect">
-            <a:avLst/>
-          </a:prstGeom>
-          <a:noFill/>
-          <a:ln>
-            <a:noFill/>
-          </a:ln>
-        </p:spPr>
-        <p:txBody>
-          <a:bodyPr anchorCtr="0" anchor="ctr" bIns="0" lIns="0" spcFirstLastPara="1" rIns="0" wrap="square" tIns="0">
-            <a:noAutofit/>
-          </a:bodyPr>
-          <a:lstStyle/>
-          <a:p>
-            <a:pPr indent="0" lvl="0" marL="0" marR="0" rtl="0" algn="l">
-              <a:spcBef>
-                <a:spcPts val="0"/>
-              </a:spcBef>
-              <a:spcAft>
-                <a:spcPts val="0"/>
-              </a:spcAft>
-              <a:buClr>
-                <a:srgbClr val="007B8A"/>
-              </a:buClr>
-              <a:buSzPts val="1300"/>
-              <a:buFont typeface="Arial"/>
-              <a:buNone/>
-            </a:pPr>
-            <a:r>
-              <a:rPr b="1" i="0" lang="en-US" sz="1300" u="none" cap="none" strike="noStrike">
-                <a:solidFill>
-                  <a:srgbClr val="007B8A"/>
-                </a:solidFill>
-                <a:latin typeface="Arial"/>
-                <a:ea typeface="Arial"/>
-                <a:cs typeface="Arial"/>
-                <a:sym typeface="Arial"/>
-              </a:rPr>
-              <a:t>References</a:t>
-            </a:r>
-            <a:endParaRPr b="0" i="0" sz="1300" u="none" cap="none" strike="noStrike">
-              <a:solidFill>
-                <a:schemeClr val="dk1"/>
-              </a:solidFill>
-              <a:latin typeface="Arial"/>
-              <a:ea typeface="Arial"/>
-              <a:cs typeface="Arial"/>
-              <a:sym typeface="Arial"/>
-            </a:endParaRPr>
-          </a:p>
-        </p:txBody>
-      </p:sp>
-      <p:sp>
-        <p:nvSpPr>
-          <p:cNvPr id="321" name="Google Shape;321;p14"/>
-          <p:cNvSpPr/>
-          <p:nvPr/>
-        </p:nvSpPr>
-        <p:spPr>
-          <a:xfrm>
-            <a:off x="777240" y="4709160"/>
-            <a:ext cx="9966960" cy="685800"/>
-          </a:xfrm>
-          <a:prstGeom prst="rect">
-            <a:avLst/>
-          </a:prstGeom>
-          <a:noFill/>
-          <a:ln>
-            <a:noFill/>
-          </a:ln>
-        </p:spPr>
-        <p:txBody>
-          <a:bodyPr anchorCtr="0" anchor="t" bIns="750" lIns="750" spcFirstLastPara="1" rIns="750" wrap="square" tIns="750">
-            <a:noAutofit/>
-          </a:bodyPr>
-          <a:lstStyle/>
-          <a:p>
-            <a:pPr indent="0" lvl="0" marL="0" marR="0" rtl="0" algn="l">
-              <a:spcBef>
-                <a:spcPts val="0"/>
-              </a:spcBef>
-              <a:spcAft>
-                <a:spcPts val="0"/>
-              </a:spcAft>
-              <a:buClr>
-                <a:srgbClr val="536171"/>
-              </a:buClr>
-              <a:buSzPts val="1400"/>
-              <a:buFont typeface="Arial"/>
-              <a:buNone/>
-            </a:pPr>
-            <a:r>
-              <a:rPr b="0" i="0" lang="en-US" sz="1400" u="none" cap="none" strike="noStrike">
-                <a:solidFill>
-                  <a:srgbClr val="536171"/>
-                </a:solidFill>
-                <a:latin typeface="Arial"/>
-                <a:ea typeface="Arial"/>
-                <a:cs typeface="Arial"/>
-                <a:sym typeface="Arial"/>
-              </a:rPr>
-              <a:t>RRDataset project data; PyTorch / torchvision EfficientNet-B0;</a:t>
-            </a:r>
-            <a:endParaRPr b="0" i="0" sz="1400" u="none" cap="none" strike="noStrike">
               <a:solidFill>
                 <a:schemeClr val="dk1"/>
               </a:solidFill>
@@ -10024,7 +10541,7 @@
       </p:sp>
       <p:cxnSp>
         <p:nvCxnSpPr>
-          <p:cNvPr id="322" name="Google Shape;322;p14"/>
+          <p:cNvPr id="320" name="Google Shape;320;p14"/>
           <p:cNvCxnSpPr/>
           <p:nvPr/>
         </p:nvCxnSpPr>
@@ -10050,7 +10567,7 @@
       </p:cxnSp>
       <p:sp>
         <p:nvSpPr>
-          <p:cNvPr id="323" name="Google Shape;323;p14"/>
+          <p:cNvPr id="321" name="Google Shape;321;p14"/>
           <p:cNvSpPr/>
           <p:nvPr/>
         </p:nvSpPr>
@@ -10074,6 +10591,9 @@
           <a:lstStyle/>
           <a:p>
             <a:pPr indent="0" lvl="0" marL="0" marR="0" rtl="0" algn="r">
+              <a:lnSpc>
+                <a:spcPct val="100000"/>
+              </a:lnSpc>
               <a:spcBef>
                 <a:spcPts val="0"/>
               </a:spcBef>
@@ -10169,6 +10689,9 @@
           <a:lstStyle/>
           <a:p>
             <a:pPr indent="0" lvl="0" marL="0" marR="0" rtl="0" algn="l">
+              <a:lnSpc>
+                <a:spcPct val="100000"/>
+              </a:lnSpc>
               <a:spcBef>
                 <a:spcPts val="0"/>
               </a:spcBef>
@@ -10234,6 +10757,9 @@
           <a:lstStyle/>
           <a:p>
             <a:pPr indent="0" lvl="0" marL="0" marR="0" rtl="0" algn="ctr">
+              <a:lnSpc>
+                <a:spcPct val="100000"/>
+              </a:lnSpc>
               <a:spcBef>
                 <a:spcPts val="0"/>
               </a:spcBef>
@@ -10297,6 +10823,9 @@
           <a:lstStyle/>
           <a:p>
             <a:pPr indent="0" lvl="0" marL="0" marR="0" rtl="0" algn="l">
+              <a:lnSpc>
+                <a:spcPct val="100000"/>
+              </a:lnSpc>
               <a:spcBef>
                 <a:spcPts val="0"/>
               </a:spcBef>
@@ -10362,6 +10891,9 @@
           <a:lstStyle/>
           <a:p>
             <a:pPr indent="0" lvl="0" marL="0" marR="0" rtl="0" algn="ctr">
+              <a:lnSpc>
+                <a:spcPct val="100000"/>
+              </a:lnSpc>
               <a:spcBef>
                 <a:spcPts val="0"/>
               </a:spcBef>
@@ -10425,6 +10957,9 @@
           <a:lstStyle/>
           <a:p>
             <a:pPr indent="0" lvl="0" marL="0" marR="0" rtl="0" algn="l">
+              <a:lnSpc>
+                <a:spcPct val="100000"/>
+              </a:lnSpc>
               <a:spcBef>
                 <a:spcPts val="0"/>
               </a:spcBef>
@@ -10490,6 +11025,9 @@
           <a:lstStyle/>
           <a:p>
             <a:pPr indent="0" lvl="0" marL="0" marR="0" rtl="0" algn="ctr">
+              <a:lnSpc>
+                <a:spcPct val="100000"/>
+              </a:lnSpc>
               <a:spcBef>
                 <a:spcPts val="0"/>
               </a:spcBef>
@@ -10553,6 +11091,9 @@
           <a:lstStyle/>
           <a:p>
             <a:pPr indent="0" lvl="0" marL="0" marR="0" rtl="0" algn="l">
+              <a:lnSpc>
+                <a:spcPct val="100000"/>
+              </a:lnSpc>
               <a:spcBef>
                 <a:spcPts val="0"/>
               </a:spcBef>
@@ -10618,6 +11159,9 @@
           <a:lstStyle/>
           <a:p>
             <a:pPr indent="0" lvl="0" marL="0" marR="0" rtl="0" algn="ctr">
+              <a:lnSpc>
+                <a:spcPct val="100000"/>
+              </a:lnSpc>
               <a:spcBef>
                 <a:spcPts val="0"/>
               </a:spcBef>
@@ -10681,6 +11225,9 @@
           <a:lstStyle/>
           <a:p>
             <a:pPr indent="0" lvl="0" marL="0" marR="0" rtl="0" algn="l">
+              <a:lnSpc>
+                <a:spcPct val="100000"/>
+              </a:lnSpc>
               <a:spcBef>
                 <a:spcPts val="0"/>
               </a:spcBef>
@@ -10746,6 +11293,9 @@
           <a:lstStyle/>
           <a:p>
             <a:pPr indent="0" lvl="0" marL="0" marR="0" rtl="0" algn="ctr">
+              <a:lnSpc>
+                <a:spcPct val="100000"/>
+              </a:lnSpc>
               <a:spcBef>
                 <a:spcPts val="0"/>
               </a:spcBef>
@@ -10809,6 +11359,9 @@
           <a:lstStyle/>
           <a:p>
             <a:pPr indent="0" lvl="0" marL="0" marR="0" rtl="0" algn="l">
+              <a:lnSpc>
+                <a:spcPct val="100000"/>
+              </a:lnSpc>
               <a:spcBef>
                 <a:spcPts val="0"/>
               </a:spcBef>
@@ -10874,6 +11427,9 @@
           <a:lstStyle/>
           <a:p>
             <a:pPr indent="0" lvl="0" marL="0" marR="0" rtl="0" algn="ctr">
+              <a:lnSpc>
+                <a:spcPct val="100000"/>
+              </a:lnSpc>
               <a:spcBef>
                 <a:spcPts val="0"/>
               </a:spcBef>
@@ -10937,6 +11493,9 @@
           <a:lstStyle/>
           <a:p>
             <a:pPr indent="0" lvl="0" marL="0" marR="0" rtl="0" algn="l">
+              <a:lnSpc>
+                <a:spcPct val="100000"/>
+              </a:lnSpc>
               <a:spcBef>
                 <a:spcPts val="0"/>
               </a:spcBef>
@@ -11002,6 +11561,9 @@
           <a:lstStyle/>
           <a:p>
             <a:pPr indent="0" lvl="0" marL="0" marR="0" rtl="0" algn="ctr">
+              <a:lnSpc>
+                <a:spcPct val="100000"/>
+              </a:lnSpc>
               <a:spcBef>
                 <a:spcPts val="0"/>
               </a:spcBef>
@@ -11065,6 +11627,9 @@
           <a:lstStyle/>
           <a:p>
             <a:pPr indent="0" lvl="0" marL="0" marR="0" rtl="0" algn="l">
+              <a:lnSpc>
+                <a:spcPct val="100000"/>
+              </a:lnSpc>
               <a:spcBef>
                 <a:spcPts val="0"/>
               </a:spcBef>
@@ -11154,6 +11719,9 @@
           <a:lstStyle/>
           <a:p>
             <a:pPr indent="0" lvl="0" marL="0" marR="0" rtl="0" algn="r">
+              <a:lnSpc>
+                <a:spcPct val="100000"/>
+              </a:lnSpc>
               <a:spcBef>
                 <a:spcPts val="0"/>
               </a:spcBef>
@@ -11249,6 +11817,9 @@
           <a:lstStyle/>
           <a:p>
             <a:pPr indent="0" lvl="0" marL="0" marR="0" rtl="0" algn="l">
+              <a:lnSpc>
+                <a:spcPct val="100000"/>
+              </a:lnSpc>
               <a:spcBef>
                 <a:spcPts val="0"/>
               </a:spcBef>
@@ -11312,6 +11883,9 @@
           <a:lstStyle/>
           <a:p>
             <a:pPr indent="0" lvl="0" marL="0" marR="0" rtl="0" algn="l">
+              <a:lnSpc>
+                <a:spcPct val="100000"/>
+              </a:lnSpc>
               <a:spcBef>
                 <a:spcPts val="0"/>
               </a:spcBef>
@@ -11383,6 +11957,9 @@
           <a:lstStyle/>
           <a:p>
             <a:pPr indent="0" lvl="0" marL="0" marR="0" rtl="0" algn="ctr">
+              <a:lnSpc>
+                <a:spcPct val="100000"/>
+              </a:lnSpc>
               <a:spcBef>
                 <a:spcPts val="0"/>
               </a:spcBef>
@@ -11446,6 +12023,9 @@
           <a:lstStyle/>
           <a:p>
             <a:pPr indent="0" lvl="0" marL="0" marR="0" rtl="0" algn="l">
+              <a:lnSpc>
+                <a:spcPct val="100000"/>
+              </a:lnSpc>
               <a:spcBef>
                 <a:spcPts val="0"/>
               </a:spcBef>
@@ -11517,6 +12097,9 @@
           <a:lstStyle/>
           <a:p>
             <a:pPr indent="0" lvl="0" marL="0" marR="0" rtl="0" algn="ctr">
+              <a:lnSpc>
+                <a:spcPct val="100000"/>
+              </a:lnSpc>
               <a:spcBef>
                 <a:spcPts val="0"/>
               </a:spcBef>
@@ -11580,6 +12163,9 @@
           <a:lstStyle/>
           <a:p>
             <a:pPr indent="0" lvl="0" marL="0" marR="0" rtl="0" algn="l">
+              <a:lnSpc>
+                <a:spcPct val="100000"/>
+              </a:lnSpc>
               <a:spcBef>
                 <a:spcPts val="0"/>
               </a:spcBef>
@@ -11651,6 +12237,9 @@
           <a:lstStyle/>
           <a:p>
             <a:pPr indent="0" lvl="0" marL="0" marR="0" rtl="0" algn="ctr">
+              <a:lnSpc>
+                <a:spcPct val="100000"/>
+              </a:lnSpc>
               <a:spcBef>
                 <a:spcPts val="0"/>
               </a:spcBef>
@@ -11722,6 +12311,9 @@
           <a:lstStyle/>
           <a:p>
             <a:pPr indent="0" lvl="0" marL="0" marR="0" rtl="0" algn="ctr">
+              <a:lnSpc>
+                <a:spcPct val="100000"/>
+              </a:lnSpc>
               <a:spcBef>
                 <a:spcPts val="0"/>
               </a:spcBef>
@@ -11793,6 +12385,9 @@
           <a:lstStyle/>
           <a:p>
             <a:pPr indent="0" lvl="0" marL="0" marR="0" rtl="0" algn="ctr">
+              <a:lnSpc>
+                <a:spcPct val="100000"/>
+              </a:lnSpc>
               <a:spcBef>
                 <a:spcPts val="0"/>
               </a:spcBef>
@@ -11908,6 +12503,9 @@
           <a:lstStyle/>
           <a:p>
             <a:pPr indent="0" lvl="0" marL="0" marR="0" rtl="0" algn="l">
+              <a:lnSpc>
+                <a:spcPct val="100000"/>
+              </a:lnSpc>
               <a:spcBef>
                 <a:spcPts val="0"/>
               </a:spcBef>
@@ -11997,6 +12595,9 @@
           <a:lstStyle/>
           <a:p>
             <a:pPr indent="0" lvl="0" marL="0" marR="0" rtl="0" algn="r">
+              <a:lnSpc>
+                <a:spcPct val="100000"/>
+              </a:lnSpc>
               <a:spcBef>
                 <a:spcPts val="0"/>
               </a:spcBef>
@@ -12092,6 +12693,9 @@
           <a:lstStyle/>
           <a:p>
             <a:pPr indent="0" lvl="0" marL="0" marR="0" rtl="0" algn="l">
+              <a:lnSpc>
+                <a:spcPct val="100000"/>
+              </a:lnSpc>
               <a:spcBef>
                 <a:spcPts val="0"/>
               </a:spcBef>
@@ -12155,6 +12759,9 @@
           <a:lstStyle/>
           <a:p>
             <a:pPr indent="0" lvl="0" marL="0" marR="0" rtl="0" algn="l">
+              <a:lnSpc>
+                <a:spcPct val="100000"/>
+              </a:lnSpc>
               <a:spcBef>
                 <a:spcPts val="0"/>
               </a:spcBef>
@@ -12218,6 +12825,9 @@
           <a:lstStyle/>
           <a:p>
             <a:pPr indent="0" lvl="0" marL="0" marR="0" rtl="0" algn="l">
+              <a:lnSpc>
+                <a:spcPct val="100000"/>
+              </a:lnSpc>
               <a:spcBef>
                 <a:spcPts val="0"/>
               </a:spcBef>
@@ -12307,6 +12917,9 @@
           <a:lstStyle/>
           <a:p>
             <a:pPr indent="0" lvl="0" marL="0" marR="0" rtl="0" algn="l">
+              <a:lnSpc>
+                <a:spcPct val="100000"/>
+              </a:lnSpc>
               <a:spcBef>
                 <a:spcPts val="0"/>
               </a:spcBef>
@@ -12370,6 +12983,9 @@
           <a:lstStyle/>
           <a:p>
             <a:pPr indent="0" lvl="0" marL="0" marR="0" rtl="0" algn="l">
+              <a:lnSpc>
+                <a:spcPct val="100000"/>
+              </a:lnSpc>
               <a:spcBef>
                 <a:spcPts val="0"/>
               </a:spcBef>
@@ -12459,6 +13075,9 @@
           <a:lstStyle/>
           <a:p>
             <a:pPr indent="0" lvl="0" marL="0" marR="0" rtl="0" algn="l">
+              <a:lnSpc>
+                <a:spcPct val="100000"/>
+              </a:lnSpc>
               <a:spcBef>
                 <a:spcPts val="0"/>
               </a:spcBef>
@@ -12522,6 +13141,9 @@
           <a:lstStyle/>
           <a:p>
             <a:pPr indent="0" lvl="0" marL="0" marR="0" rtl="0" algn="l">
+              <a:lnSpc>
+                <a:spcPct val="100000"/>
+              </a:lnSpc>
               <a:spcBef>
                 <a:spcPts val="0"/>
               </a:spcBef>
@@ -12611,6 +13233,9 @@
           <a:lstStyle/>
           <a:p>
             <a:pPr indent="0" lvl="0" marL="0" marR="0" rtl="0" algn="l">
+              <a:lnSpc>
+                <a:spcPct val="100000"/>
+              </a:lnSpc>
               <a:spcBef>
                 <a:spcPts val="0"/>
               </a:spcBef>
@@ -12674,6 +13299,9 @@
           <a:lstStyle/>
           <a:p>
             <a:pPr indent="0" lvl="0" marL="0" marR="0" rtl="0" algn="l">
+              <a:lnSpc>
+                <a:spcPct val="100000"/>
+              </a:lnSpc>
               <a:spcBef>
                 <a:spcPts val="0"/>
               </a:spcBef>
@@ -12737,6 +13365,9 @@
           <a:lstStyle/>
           <a:p>
             <a:pPr indent="0" lvl="0" marL="0" marR="0" rtl="0" algn="l">
+              <a:lnSpc>
+                <a:spcPct val="100000"/>
+              </a:lnSpc>
               <a:spcBef>
                 <a:spcPts val="0"/>
               </a:spcBef>
@@ -12826,6 +13457,9 @@
           <a:lstStyle/>
           <a:p>
             <a:pPr indent="0" lvl="0" marL="0" marR="0" rtl="0" algn="r">
+              <a:lnSpc>
+                <a:spcPct val="100000"/>
+              </a:lnSpc>
               <a:spcBef>
                 <a:spcPts val="0"/>
               </a:spcBef>
@@ -12921,6 +13555,9 @@
           <a:lstStyle/>
           <a:p>
             <a:pPr indent="0" lvl="0" marL="0" marR="0" rtl="0" algn="l">
+              <a:lnSpc>
+                <a:spcPct val="100000"/>
+              </a:lnSpc>
               <a:spcBef>
                 <a:spcPts val="0"/>
               </a:spcBef>
@@ -12984,6 +13621,9 @@
           <a:lstStyle/>
           <a:p>
             <a:pPr indent="0" lvl="0" marL="0" marR="0" rtl="0" algn="l">
+              <a:lnSpc>
+                <a:spcPct val="100000"/>
+              </a:lnSpc>
               <a:spcBef>
                 <a:spcPts val="0"/>
               </a:spcBef>
@@ -13054,7 +13694,10 @@
           </a:bodyPr>
           <a:lstStyle/>
           <a:p>
-            <a:pPr indent="0" lvl="0" marL="0" marR="0" rtl="0" algn="l">
+            <a:pPr indent="0" lvl="0" marL="0" marR="0" rtl="0" algn="ctr">
+              <a:lnSpc>
+                <a:spcPct val="100000"/>
+              </a:lnSpc>
               <a:spcBef>
                 <a:spcPts val="0"/>
               </a:spcBef>
@@ -13069,7 +13712,7 @@
               <a:buNone/>
             </a:pPr>
             <a:r>
-              <a:rPr b="1" i="0" lang="en-US" sz="1445" u="none" cap="none" strike="noStrike">
+              <a:rPr b="1" i="0" lang="en-US" sz="1245" u="none" cap="none" strike="noStrike">
                 <a:solidFill>
                   <a:srgbClr val="FFFFFF"/>
                 </a:solidFill>
@@ -13080,7 +13723,7 @@
               </a:rPr>
               <a:t>Transformation</a:t>
             </a:r>
-            <a:endParaRPr b="0" i="0" sz="1445" u="none" cap="none" strike="noStrike">
+            <a:endParaRPr b="0" i="0" sz="1245" u="none" cap="none" strike="noStrike">
               <a:solidFill>
                 <a:schemeClr val="dk1"/>
               </a:solidFill>
@@ -13126,6 +13769,9 @@
           <a:lstStyle/>
           <a:p>
             <a:pPr indent="0" lvl="0" marL="0" marR="0" rtl="0" algn="ctr">
+              <a:lnSpc>
+                <a:spcPct val="100000"/>
+              </a:lnSpc>
               <a:spcBef>
                 <a:spcPts val="0"/>
               </a:spcBef>
@@ -13140,7 +13786,7 @@
               <a:buNone/>
             </a:pPr>
             <a:r>
-              <a:rPr b="1" i="0" lang="en-US" sz="1445" u="none" cap="none" strike="noStrike">
+              <a:rPr b="1" i="0" lang="en-US" sz="1200" u="none" cap="none" strike="noStrike">
                 <a:solidFill>
                   <a:srgbClr val="FFFFFF"/>
                 </a:solidFill>
@@ -13151,7 +13797,7 @@
               </a:rPr>
               <a:t>Real</a:t>
             </a:r>
-            <a:endParaRPr b="0" i="0" sz="1445" u="none" cap="none" strike="noStrike">
+            <a:endParaRPr b="0" i="0" sz="1200" u="none" cap="none" strike="noStrike">
               <a:solidFill>
                 <a:schemeClr val="dk1"/>
               </a:solidFill>
@@ -13197,6 +13843,9 @@
           <a:lstStyle/>
           <a:p>
             <a:pPr indent="0" lvl="0" marL="0" marR="0" rtl="0" algn="ctr">
+              <a:lnSpc>
+                <a:spcPct val="100000"/>
+              </a:lnSpc>
               <a:spcBef>
                 <a:spcPts val="0"/>
               </a:spcBef>
@@ -13211,7 +13860,7 @@
               <a:buNone/>
             </a:pPr>
             <a:r>
-              <a:rPr b="1" i="0" lang="en-US" sz="1445" u="none" cap="none" strike="noStrike">
+              <a:rPr b="1" i="0" lang="en-US" sz="1200" u="none" cap="none" strike="noStrike">
                 <a:solidFill>
                   <a:srgbClr val="FFFFFF"/>
                 </a:solidFill>
@@ -13222,7 +13871,7 @@
               </a:rPr>
               <a:t>AI</a:t>
             </a:r>
-            <a:endParaRPr b="0" i="0" sz="1445" u="none" cap="none" strike="noStrike">
+            <a:endParaRPr b="0" i="0" sz="1200" u="none" cap="none" strike="noStrike">
               <a:solidFill>
                 <a:schemeClr val="dk1"/>
               </a:solidFill>
@@ -13268,6 +13917,9 @@
           <a:lstStyle/>
           <a:p>
             <a:pPr indent="0" lvl="0" marL="0" marR="0" rtl="0" algn="ctr">
+              <a:lnSpc>
+                <a:spcPct val="100000"/>
+              </a:lnSpc>
               <a:spcBef>
                 <a:spcPts val="0"/>
               </a:spcBef>
@@ -13282,7 +13934,7 @@
               <a:buNone/>
             </a:pPr>
             <a:r>
-              <a:rPr b="1" i="0" lang="en-US" sz="1445" u="none" cap="none" strike="noStrike">
+              <a:rPr b="1" i="0" lang="en-US" sz="1200" u="none" cap="none" strike="noStrike">
                 <a:solidFill>
                   <a:srgbClr val="FFFFFF"/>
                 </a:solidFill>
@@ -13293,7 +13945,7 @@
               </a:rPr>
               <a:t>Total</a:t>
             </a:r>
-            <a:endParaRPr b="0" i="0" sz="1445" u="none" cap="none" strike="noStrike">
+            <a:endParaRPr b="0" i="0" sz="1200" u="none" cap="none" strike="noStrike">
               <a:solidFill>
                 <a:schemeClr val="dk1"/>
               </a:solidFill>
@@ -13338,7 +13990,10 @@
           </a:bodyPr>
           <a:lstStyle/>
           <a:p>
-            <a:pPr indent="0" lvl="0" marL="0" marR="0" rtl="0" algn="l">
+            <a:pPr indent="0" lvl="0" marL="0" marR="0" rtl="0" algn="ctr">
+              <a:lnSpc>
+                <a:spcPct val="100000"/>
+              </a:lnSpc>
               <a:spcBef>
                 <a:spcPts val="0"/>
               </a:spcBef>
@@ -13410,6 +14065,9 @@
           <a:lstStyle/>
           <a:p>
             <a:pPr indent="0" lvl="0" marL="0" marR="0" rtl="0" algn="ctr">
+              <a:lnSpc>
+                <a:spcPct val="100000"/>
+              </a:lnSpc>
               <a:spcBef>
                 <a:spcPts val="0"/>
               </a:spcBef>
@@ -13481,6 +14139,9 @@
           <a:lstStyle/>
           <a:p>
             <a:pPr indent="0" lvl="0" marL="0" marR="0" rtl="0" algn="ctr">
+              <a:lnSpc>
+                <a:spcPct val="100000"/>
+              </a:lnSpc>
               <a:spcBef>
                 <a:spcPts val="0"/>
               </a:spcBef>
@@ -13552,6 +14213,9 @@
           <a:lstStyle/>
           <a:p>
             <a:pPr indent="0" lvl="0" marL="0" marR="0" rtl="0" algn="ctr">
+              <a:lnSpc>
+                <a:spcPct val="100000"/>
+              </a:lnSpc>
               <a:spcBef>
                 <a:spcPts val="0"/>
               </a:spcBef>
@@ -13622,7 +14286,10 @@
           </a:bodyPr>
           <a:lstStyle/>
           <a:p>
-            <a:pPr indent="0" lvl="0" marL="0" marR="0" rtl="0" algn="l">
+            <a:pPr indent="0" lvl="0" marL="0" marR="0" rtl="0" algn="ctr">
+              <a:lnSpc>
+                <a:spcPct val="100000"/>
+              </a:lnSpc>
               <a:spcBef>
                 <a:spcPts val="0"/>
               </a:spcBef>
@@ -13694,6 +14361,9 @@
           <a:lstStyle/>
           <a:p>
             <a:pPr indent="0" lvl="0" marL="0" marR="0" rtl="0" algn="ctr">
+              <a:lnSpc>
+                <a:spcPct val="100000"/>
+              </a:lnSpc>
               <a:spcBef>
                 <a:spcPts val="0"/>
               </a:spcBef>
@@ -13765,6 +14435,9 @@
           <a:lstStyle/>
           <a:p>
             <a:pPr indent="0" lvl="0" marL="0" marR="0" rtl="0" algn="ctr">
+              <a:lnSpc>
+                <a:spcPct val="100000"/>
+              </a:lnSpc>
               <a:spcBef>
                 <a:spcPts val="0"/>
               </a:spcBef>
@@ -13836,6 +14509,9 @@
           <a:lstStyle/>
           <a:p>
             <a:pPr indent="0" lvl="0" marL="0" marR="0" rtl="0" algn="ctr">
+              <a:lnSpc>
+                <a:spcPct val="100000"/>
+              </a:lnSpc>
               <a:spcBef>
                 <a:spcPts val="0"/>
               </a:spcBef>
@@ -13906,7 +14582,10 @@
           </a:bodyPr>
           <a:lstStyle/>
           <a:p>
-            <a:pPr indent="0" lvl="0" marL="0" marR="0" rtl="0" algn="l">
+            <a:pPr indent="0" lvl="0" marL="0" marR="0" rtl="0" algn="ctr">
+              <a:lnSpc>
+                <a:spcPct val="100000"/>
+              </a:lnSpc>
               <a:spcBef>
                 <a:spcPts val="0"/>
               </a:spcBef>
@@ -13978,6 +14657,9 @@
           <a:lstStyle/>
           <a:p>
             <a:pPr indent="0" lvl="0" marL="0" marR="0" rtl="0" algn="ctr">
+              <a:lnSpc>
+                <a:spcPct val="100000"/>
+              </a:lnSpc>
               <a:spcBef>
                 <a:spcPts val="0"/>
               </a:spcBef>
@@ -14049,6 +14731,9 @@
           <a:lstStyle/>
           <a:p>
             <a:pPr indent="0" lvl="0" marL="0" marR="0" rtl="0" algn="ctr">
+              <a:lnSpc>
+                <a:spcPct val="100000"/>
+              </a:lnSpc>
               <a:spcBef>
                 <a:spcPts val="0"/>
               </a:spcBef>
@@ -14120,6 +14805,9 @@
           <a:lstStyle/>
           <a:p>
             <a:pPr indent="0" lvl="0" marL="0" marR="0" rtl="0" algn="ctr">
+              <a:lnSpc>
+                <a:spcPct val="100000"/>
+              </a:lnSpc>
               <a:spcBef>
                 <a:spcPts val="0"/>
               </a:spcBef>
@@ -14190,7 +14878,10 @@
           </a:bodyPr>
           <a:lstStyle/>
           <a:p>
-            <a:pPr indent="0" lvl="0" marL="0" marR="0" rtl="0" algn="l">
+            <a:pPr indent="0" lvl="0" marL="0" marR="0" rtl="0" algn="ctr">
+              <a:lnSpc>
+                <a:spcPct val="100000"/>
+              </a:lnSpc>
               <a:spcBef>
                 <a:spcPts val="0"/>
               </a:spcBef>
@@ -14262,6 +14953,9 @@
           <a:lstStyle/>
           <a:p>
             <a:pPr indent="0" lvl="0" marL="0" marR="0" rtl="0" algn="ctr">
+              <a:lnSpc>
+                <a:spcPct val="100000"/>
+              </a:lnSpc>
               <a:spcBef>
                 <a:spcPts val="0"/>
               </a:spcBef>
@@ -14333,6 +15027,9 @@
           <a:lstStyle/>
           <a:p>
             <a:pPr indent="0" lvl="0" marL="0" marR="0" rtl="0" algn="ctr">
+              <a:lnSpc>
+                <a:spcPct val="100000"/>
+              </a:lnSpc>
               <a:spcBef>
                 <a:spcPts val="0"/>
               </a:spcBef>
@@ -14404,6 +15101,9 @@
           <a:lstStyle/>
           <a:p>
             <a:pPr indent="0" lvl="0" marL="0" marR="0" rtl="0" algn="ctr">
+              <a:lnSpc>
+                <a:spcPct val="100000"/>
+              </a:lnSpc>
               <a:spcBef>
                 <a:spcPts val="0"/>
               </a:spcBef>
@@ -14467,6 +15167,9 @@
           <a:lstStyle/>
           <a:p>
             <a:pPr indent="0" lvl="0" marL="0" marR="0" rtl="0" algn="ctr">
+              <a:lnSpc>
+                <a:spcPct val="100000"/>
+              </a:lnSpc>
               <a:spcBef>
                 <a:spcPts val="0"/>
               </a:spcBef>
@@ -14530,6 +15233,9 @@
           <a:lstStyle/>
           <a:p>
             <a:pPr indent="0" lvl="0" marL="0" marR="0" rtl="0" algn="ctr">
+              <a:lnSpc>
+                <a:spcPct val="100000"/>
+              </a:lnSpc>
               <a:spcBef>
                 <a:spcPts val="0"/>
               </a:spcBef>
@@ -14593,6 +15299,9 @@
           <a:lstStyle/>
           <a:p>
             <a:pPr indent="0" lvl="0" marL="0" marR="0" rtl="0" algn="ctr">
+              <a:lnSpc>
+                <a:spcPct val="100000"/>
+              </a:lnSpc>
               <a:spcBef>
                 <a:spcPts val="0"/>
               </a:spcBef>
@@ -14656,6 +15365,9 @@
           <a:lstStyle/>
           <a:p>
             <a:pPr indent="0" lvl="0" marL="0" marR="0" rtl="0" algn="ctr">
+              <a:lnSpc>
+                <a:spcPct val="100000"/>
+              </a:lnSpc>
               <a:spcBef>
                 <a:spcPts val="0"/>
               </a:spcBef>
@@ -14719,6 +15431,9 @@
           <a:lstStyle/>
           <a:p>
             <a:pPr indent="0" lvl="0" marL="0" marR="0" rtl="0" algn="ctr">
+              <a:lnSpc>
+                <a:spcPct val="100000"/>
+              </a:lnSpc>
               <a:spcBef>
                 <a:spcPts val="0"/>
               </a:spcBef>
@@ -14782,6 +15497,9 @@
           <a:lstStyle/>
           <a:p>
             <a:pPr indent="0" lvl="0" marL="0" marR="0" rtl="0" algn="ctr">
+              <a:lnSpc>
+                <a:spcPct val="100000"/>
+              </a:lnSpc>
               <a:spcBef>
                 <a:spcPts val="0"/>
               </a:spcBef>
@@ -14845,6 +15563,9 @@
           <a:lstStyle/>
           <a:p>
             <a:pPr indent="0" lvl="0" marL="0" marR="0" rtl="0" algn="l">
+              <a:lnSpc>
+                <a:spcPct val="100000"/>
+              </a:lnSpc>
               <a:spcBef>
                 <a:spcPts val="0"/>
               </a:spcBef>
@@ -14910,6 +15631,9 @@
           <a:lstStyle/>
           <a:p>
             <a:pPr indent="0" lvl="0" marL="0" marR="0" rtl="0" algn="ctr">
+              <a:lnSpc>
+                <a:spcPct val="100000"/>
+              </a:lnSpc>
               <a:spcBef>
                 <a:spcPts val="0"/>
               </a:spcBef>
@@ -14975,6 +15699,9 @@
           <a:lstStyle/>
           <a:p>
             <a:pPr indent="0" lvl="0" marL="0" marR="0" rtl="0" algn="ctr">
+              <a:lnSpc>
+                <a:spcPct val="100000"/>
+              </a:lnSpc>
               <a:spcBef>
                 <a:spcPts val="0"/>
               </a:spcBef>
@@ -15046,6 +15773,9 @@
           <a:lstStyle/>
           <a:p>
             <a:pPr indent="0" lvl="0" marL="0" marR="0" rtl="0" algn="l">
+              <a:lnSpc>
+                <a:spcPct val="100000"/>
+              </a:lnSpc>
               <a:spcBef>
                 <a:spcPts val="0"/>
               </a:spcBef>
@@ -15117,6 +15847,9 @@
           <a:lstStyle/>
           <a:p>
             <a:pPr indent="0" lvl="0" marL="0" marR="0" rtl="0" algn="ctr">
+              <a:lnSpc>
+                <a:spcPct val="100000"/>
+              </a:lnSpc>
               <a:spcBef>
                 <a:spcPts val="0"/>
               </a:spcBef>
@@ -15188,6 +15921,9 @@
           <a:lstStyle/>
           <a:p>
             <a:pPr indent="0" lvl="0" marL="0" marR="0" rtl="0" algn="ctr">
+              <a:lnSpc>
+                <a:spcPct val="100000"/>
+              </a:lnSpc>
               <a:spcBef>
                 <a:spcPts val="0"/>
               </a:spcBef>
@@ -15258,7 +15994,10 @@
           </a:bodyPr>
           <a:lstStyle/>
           <a:p>
-            <a:pPr indent="0" lvl="0" marL="0" marR="0" rtl="0" algn="l">
+            <a:pPr indent="0" lvl="0" marL="0" marR="0" rtl="0" algn="ctr">
+              <a:lnSpc>
+                <a:spcPct val="100000"/>
+              </a:lnSpc>
               <a:spcBef>
                 <a:spcPts val="0"/>
               </a:spcBef>
@@ -15330,6 +16069,9 @@
           <a:lstStyle/>
           <a:p>
             <a:pPr indent="0" lvl="0" marL="0" marR="0" rtl="0" algn="ctr">
+              <a:lnSpc>
+                <a:spcPct val="100000"/>
+              </a:lnSpc>
               <a:spcBef>
                 <a:spcPts val="0"/>
               </a:spcBef>
@@ -15401,6 +16143,9 @@
           <a:lstStyle/>
           <a:p>
             <a:pPr indent="0" lvl="0" marL="0" marR="0" rtl="0" algn="ctr">
+              <a:lnSpc>
+                <a:spcPct val="100000"/>
+              </a:lnSpc>
               <a:spcBef>
                 <a:spcPts val="0"/>
               </a:spcBef>
@@ -15471,7 +16216,10 @@
           </a:bodyPr>
           <a:lstStyle/>
           <a:p>
-            <a:pPr indent="0" lvl="0" marL="0" marR="0" rtl="0" algn="l">
+            <a:pPr indent="0" lvl="0" marL="0" marR="0" rtl="0" algn="ctr">
+              <a:lnSpc>
+                <a:spcPct val="100000"/>
+              </a:lnSpc>
               <a:spcBef>
                 <a:spcPts val="0"/>
               </a:spcBef>
@@ -15543,6 +16291,9 @@
           <a:lstStyle/>
           <a:p>
             <a:pPr indent="0" lvl="0" marL="0" marR="0" rtl="0" algn="ctr">
+              <a:lnSpc>
+                <a:spcPct val="100000"/>
+              </a:lnSpc>
               <a:spcBef>
                 <a:spcPts val="0"/>
               </a:spcBef>
@@ -15614,6 +16365,9 @@
           <a:lstStyle/>
           <a:p>
             <a:pPr indent="0" lvl="0" marL="0" marR="0" rtl="0" algn="ctr">
+              <a:lnSpc>
+                <a:spcPct val="100000"/>
+              </a:lnSpc>
               <a:spcBef>
                 <a:spcPts val="0"/>
               </a:spcBef>
@@ -15703,6 +16457,9 @@
           <a:lstStyle/>
           <a:p>
             <a:pPr indent="0" lvl="0" marL="0" marR="0" rtl="0" algn="r">
+              <a:lnSpc>
+                <a:spcPct val="100000"/>
+              </a:lnSpc>
               <a:spcBef>
                 <a:spcPts val="0"/>
               </a:spcBef>
@@ -15798,6 +16555,9 @@
           <a:lstStyle/>
           <a:p>
             <a:pPr indent="0" lvl="0" marL="0" marR="0" rtl="0" algn="l">
+              <a:lnSpc>
+                <a:spcPct val="100000"/>
+              </a:lnSpc>
               <a:spcBef>
                 <a:spcPts val="0"/>
               </a:spcBef>
@@ -15861,6 +16621,9 @@
           <a:lstStyle/>
           <a:p>
             <a:pPr indent="0" lvl="0" marL="0" marR="0" rtl="0" algn="l">
+              <a:lnSpc>
+                <a:spcPct val="100000"/>
+              </a:lnSpc>
               <a:spcBef>
                 <a:spcPts val="0"/>
               </a:spcBef>
@@ -15932,6 +16695,9 @@
           <a:lstStyle/>
           <a:p>
             <a:pPr indent="0" lvl="0" marL="0" marR="0" rtl="0" algn="ctr">
+              <a:lnSpc>
+                <a:spcPct val="100000"/>
+              </a:lnSpc>
               <a:spcBef>
                 <a:spcPts val="0"/>
               </a:spcBef>
@@ -15997,6 +16763,9 @@
           <a:lstStyle/>
           <a:p>
             <a:pPr indent="0" lvl="0" marL="0" marR="0" rtl="0" algn="ctr">
+              <a:lnSpc>
+                <a:spcPct val="100000"/>
+              </a:lnSpc>
               <a:spcBef>
                 <a:spcPts val="0"/>
               </a:spcBef>
@@ -16034,6 +16803,9 @@
           </a:p>
           <a:p>
             <a:pPr indent="0" lvl="0" marL="0" marR="0" rtl="0" algn="ctr">
+              <a:lnSpc>
+                <a:spcPct val="100000"/>
+              </a:lnSpc>
               <a:spcBef>
                 <a:spcPts val="0"/>
               </a:spcBef>
@@ -16099,6 +16871,9 @@
           <a:lstStyle/>
           <a:p>
             <a:pPr indent="0" lvl="0" marL="0" marR="0" rtl="0" algn="ctr">
+              <a:lnSpc>
+                <a:spcPct val="100000"/>
+              </a:lnSpc>
               <a:spcBef>
                 <a:spcPts val="0"/>
               </a:spcBef>
@@ -16136,6 +16911,9 @@
           </a:p>
           <a:p>
             <a:pPr indent="0" lvl="0" marL="0" marR="0" rtl="0" algn="ctr">
+              <a:lnSpc>
+                <a:spcPct val="100000"/>
+              </a:lnSpc>
               <a:spcBef>
                 <a:spcPts val="0"/>
               </a:spcBef>
@@ -16201,6 +16979,9 @@
           <a:lstStyle/>
           <a:p>
             <a:pPr indent="0" lvl="0" marL="0" marR="0" rtl="0" algn="ctr">
+              <a:lnSpc>
+                <a:spcPct val="100000"/>
+              </a:lnSpc>
               <a:spcBef>
                 <a:spcPts val="0"/>
               </a:spcBef>
@@ -16238,6 +17019,9 @@
           </a:p>
           <a:p>
             <a:pPr indent="0" lvl="0" marL="0" marR="0" rtl="0" algn="ctr">
+              <a:lnSpc>
+                <a:spcPct val="100000"/>
+              </a:lnSpc>
               <a:spcBef>
                 <a:spcPts val="0"/>
               </a:spcBef>
@@ -16379,6 +17163,9 @@
           <a:lstStyle/>
           <a:p>
             <a:pPr indent="0" lvl="0" marL="0" marR="0" rtl="0" algn="l">
+              <a:lnSpc>
+                <a:spcPct val="100000"/>
+              </a:lnSpc>
               <a:spcBef>
                 <a:spcPts val="0"/>
               </a:spcBef>
@@ -16442,6 +17229,9 @@
           <a:lstStyle/>
           <a:p>
             <a:pPr indent="0" lvl="0" marL="0" marR="0" rtl="0" algn="l">
+              <a:lnSpc>
+                <a:spcPct val="100000"/>
+              </a:lnSpc>
               <a:spcBef>
                 <a:spcPts val="0"/>
               </a:spcBef>
@@ -16513,6 +17303,9 @@
           <a:lstStyle/>
           <a:p>
             <a:pPr indent="0" lvl="0" marL="0" marR="0" rtl="0" algn="l">
+              <a:lnSpc>
+                <a:spcPct val="100000"/>
+              </a:lnSpc>
               <a:spcBef>
                 <a:spcPts val="0"/>
               </a:spcBef>
@@ -16584,6 +17377,9 @@
           <a:lstStyle/>
           <a:p>
             <a:pPr indent="0" lvl="0" marL="0" marR="0" rtl="0" algn="ctr">
+              <a:lnSpc>
+                <a:spcPct val="100000"/>
+              </a:lnSpc>
               <a:spcBef>
                 <a:spcPts val="0"/>
               </a:spcBef>
@@ -16655,6 +17451,9 @@
           <a:lstStyle/>
           <a:p>
             <a:pPr indent="0" lvl="0" marL="0" marR="0" rtl="0" algn="l">
+              <a:lnSpc>
+                <a:spcPct val="100000"/>
+              </a:lnSpc>
               <a:spcBef>
                 <a:spcPts val="0"/>
               </a:spcBef>
@@ -16726,6 +17525,9 @@
           <a:lstStyle/>
           <a:p>
             <a:pPr indent="0" lvl="0" marL="0" marR="0" rtl="0" algn="ctr">
+              <a:lnSpc>
+                <a:spcPct val="100000"/>
+              </a:lnSpc>
               <a:spcBef>
                 <a:spcPts val="0"/>
               </a:spcBef>
@@ -16797,6 +17599,9 @@
           <a:lstStyle/>
           <a:p>
             <a:pPr indent="0" lvl="0" marL="0" marR="0" rtl="0" algn="l">
+              <a:lnSpc>
+                <a:spcPct val="100000"/>
+              </a:lnSpc>
               <a:spcBef>
                 <a:spcPts val="0"/>
               </a:spcBef>
@@ -16868,6 +17673,9 @@
           <a:lstStyle/>
           <a:p>
             <a:pPr indent="0" lvl="0" marL="0" marR="0" rtl="0" algn="ctr">
+              <a:lnSpc>
+                <a:spcPct val="100000"/>
+              </a:lnSpc>
               <a:spcBef>
                 <a:spcPts val="0"/>
               </a:spcBef>
@@ -16939,6 +17747,9 @@
           <a:lstStyle/>
           <a:p>
             <a:pPr indent="0" lvl="0" marL="0" marR="0" rtl="0" algn="l">
+              <a:lnSpc>
+                <a:spcPct val="100000"/>
+              </a:lnSpc>
               <a:spcBef>
                 <a:spcPts val="0"/>
               </a:spcBef>
@@ -17010,6 +17821,9 @@
           <a:lstStyle/>
           <a:p>
             <a:pPr indent="0" lvl="0" marL="0" marR="0" rtl="0" algn="ctr">
+              <a:lnSpc>
+                <a:spcPct val="100000"/>
+              </a:lnSpc>
               <a:spcBef>
                 <a:spcPts val="0"/>
               </a:spcBef>
@@ -17073,6 +17887,9 @@
           <a:lstStyle/>
           <a:p>
             <a:pPr indent="0" lvl="0" marL="0" marR="0" rtl="0" algn="l">
+              <a:lnSpc>
+                <a:spcPct val="100000"/>
+              </a:lnSpc>
               <a:spcBef>
                 <a:spcPts val="0"/>
               </a:spcBef>
@@ -17162,6 +17979,9 @@
           <a:lstStyle/>
           <a:p>
             <a:pPr indent="0" lvl="0" marL="0" marR="0" rtl="0" algn="r">
+              <a:lnSpc>
+                <a:spcPct val="100000"/>
+              </a:lnSpc>
               <a:spcBef>
                 <a:spcPts val="0"/>
               </a:spcBef>
@@ -17257,6 +18077,9 @@
           <a:lstStyle/>
           <a:p>
             <a:pPr indent="0" lvl="0" marL="0" marR="0" rtl="0" algn="l">
+              <a:lnSpc>
+                <a:spcPct val="100000"/>
+              </a:lnSpc>
               <a:spcBef>
                 <a:spcPts val="0"/>
               </a:spcBef>
@@ -17320,6 +18143,9 @@
           <a:lstStyle/>
           <a:p>
             <a:pPr indent="0" lvl="0" marL="0" marR="0" rtl="0" algn="l">
+              <a:lnSpc>
+                <a:spcPct val="100000"/>
+              </a:lnSpc>
               <a:spcBef>
                 <a:spcPts val="0"/>
               </a:spcBef>
@@ -17390,7 +18216,10 @@
           </a:bodyPr>
           <a:lstStyle/>
           <a:p>
-            <a:pPr indent="0" lvl="0" marL="0" marR="0" rtl="0" algn="l">
+            <a:pPr indent="0" lvl="0" marL="0" marR="0" rtl="0" algn="ctr">
+              <a:lnSpc>
+                <a:spcPct val="100000"/>
+              </a:lnSpc>
               <a:spcBef>
                 <a:spcPts val="0"/>
               </a:spcBef>
@@ -17462,6 +18291,9 @@
           <a:lstStyle/>
           <a:p>
             <a:pPr indent="0" lvl="0" marL="0" marR="0" rtl="0" algn="ctr">
+              <a:lnSpc>
+                <a:spcPct val="100000"/>
+              </a:lnSpc>
               <a:spcBef>
                 <a:spcPts val="0"/>
               </a:spcBef>
@@ -17532,7 +18364,10 @@
           </a:bodyPr>
           <a:lstStyle/>
           <a:p>
-            <a:pPr indent="0" lvl="0" marL="0" marR="0" rtl="0" algn="l">
+            <a:pPr indent="0" lvl="0" marL="0" marR="0" rtl="0" algn="ctr">
+              <a:lnSpc>
+                <a:spcPct val="100000"/>
+              </a:lnSpc>
               <a:spcBef>
                 <a:spcPts val="0"/>
               </a:spcBef>
@@ -17604,6 +18439,9 @@
           <a:lstStyle/>
           <a:p>
             <a:pPr indent="0" lvl="0" marL="0" marR="0" rtl="0" algn="ctr">
+              <a:lnSpc>
+                <a:spcPct val="100000"/>
+              </a:lnSpc>
               <a:spcBef>
                 <a:spcPts val="0"/>
               </a:spcBef>
@@ -17674,7 +18512,10 @@
           </a:bodyPr>
           <a:lstStyle/>
           <a:p>
-            <a:pPr indent="0" lvl="0" marL="0" marR="0" rtl="0" algn="l">
+            <a:pPr indent="0" lvl="0" marL="0" marR="0" rtl="0" algn="ctr">
+              <a:lnSpc>
+                <a:spcPct val="100000"/>
+              </a:lnSpc>
               <a:spcBef>
                 <a:spcPts val="0"/>
               </a:spcBef>
@@ -17746,6 +18587,9 @@
           <a:lstStyle/>
           <a:p>
             <a:pPr indent="0" lvl="0" marL="0" marR="0" rtl="0" algn="ctr">
+              <a:lnSpc>
+                <a:spcPct val="100000"/>
+              </a:lnSpc>
               <a:spcBef>
                 <a:spcPts val="0"/>
               </a:spcBef>
@@ -17816,7 +18660,10 @@
           </a:bodyPr>
           <a:lstStyle/>
           <a:p>
-            <a:pPr indent="0" lvl="0" marL="0" marR="0" rtl="0" algn="l">
+            <a:pPr indent="0" lvl="0" marL="0" marR="0" rtl="0" algn="ctr">
+              <a:lnSpc>
+                <a:spcPct val="100000"/>
+              </a:lnSpc>
               <a:spcBef>
                 <a:spcPts val="0"/>
               </a:spcBef>
@@ -17888,6 +18735,9 @@
           <a:lstStyle/>
           <a:p>
             <a:pPr indent="0" lvl="0" marL="0" marR="0" rtl="0" algn="ctr">
+              <a:lnSpc>
+                <a:spcPct val="100000"/>
+              </a:lnSpc>
               <a:spcBef>
                 <a:spcPts val="0"/>
               </a:spcBef>
@@ -17958,7 +18808,10 @@
           </a:bodyPr>
           <a:lstStyle/>
           <a:p>
-            <a:pPr indent="0" lvl="0" marL="0" marR="0" rtl="0" algn="l">
+            <a:pPr indent="0" lvl="0" marL="0" marR="0" rtl="0" algn="ctr">
+              <a:lnSpc>
+                <a:spcPct val="100000"/>
+              </a:lnSpc>
               <a:spcBef>
                 <a:spcPts val="0"/>
               </a:spcBef>
@@ -18030,6 +18883,9 @@
           <a:lstStyle/>
           <a:p>
             <a:pPr indent="0" lvl="0" marL="0" marR="0" rtl="0" algn="ctr">
+              <a:lnSpc>
+                <a:spcPct val="100000"/>
+              </a:lnSpc>
               <a:spcBef>
                 <a:spcPts val="0"/>
               </a:spcBef>
@@ -18100,7 +18956,10 @@
           </a:bodyPr>
           <a:lstStyle/>
           <a:p>
-            <a:pPr indent="0" lvl="0" marL="0" marR="0" rtl="0" algn="l">
+            <a:pPr indent="0" lvl="0" marL="0" marR="0" rtl="0" algn="ctr">
+              <a:lnSpc>
+                <a:spcPct val="100000"/>
+              </a:lnSpc>
               <a:spcBef>
                 <a:spcPts val="0"/>
               </a:spcBef>
@@ -18172,6 +19031,9 @@
           <a:lstStyle/>
           <a:p>
             <a:pPr indent="0" lvl="0" marL="0" marR="0" rtl="0" algn="ctr">
+              <a:lnSpc>
+                <a:spcPct val="100000"/>
+              </a:lnSpc>
               <a:spcBef>
                 <a:spcPts val="0"/>
               </a:spcBef>
@@ -18242,7 +19104,10 @@
           </a:bodyPr>
           <a:lstStyle/>
           <a:p>
-            <a:pPr indent="0" lvl="0" marL="0" marR="0" rtl="0" algn="l">
+            <a:pPr indent="0" lvl="0" marL="0" marR="0" rtl="0" algn="ctr">
+              <a:lnSpc>
+                <a:spcPct val="100000"/>
+              </a:lnSpc>
               <a:spcBef>
                 <a:spcPts val="0"/>
               </a:spcBef>
@@ -18314,6 +19179,9 @@
           <a:lstStyle/>
           <a:p>
             <a:pPr indent="0" lvl="0" marL="0" marR="0" rtl="0" algn="ctr">
+              <a:lnSpc>
+                <a:spcPct val="100000"/>
+              </a:lnSpc>
               <a:spcBef>
                 <a:spcPts val="0"/>
               </a:spcBef>
@@ -18377,6 +19245,9 @@
           <a:lstStyle/>
           <a:p>
             <a:pPr indent="0" lvl="0" marL="0" marR="0" rtl="0" algn="l">
+              <a:lnSpc>
+                <a:spcPct val="100000"/>
+              </a:lnSpc>
               <a:spcBef>
                 <a:spcPts val="0"/>
               </a:spcBef>
@@ -18440,6 +19311,9 @@
           <a:lstStyle/>
           <a:p>
             <a:pPr indent="0" lvl="0" marL="0" marR="0" rtl="0" algn="l">
+              <a:lnSpc>
+                <a:spcPct val="100000"/>
+              </a:lnSpc>
               <a:spcBef>
                 <a:spcPts val="0"/>
               </a:spcBef>
@@ -18503,6 +19377,9 @@
           <a:lstStyle/>
           <a:p>
             <a:pPr indent="0" lvl="0" marL="0" marR="0" rtl="0" algn="l">
+              <a:lnSpc>
+                <a:spcPct val="100000"/>
+              </a:lnSpc>
               <a:spcBef>
                 <a:spcPts val="0"/>
               </a:spcBef>
@@ -18592,6 +19469,9 @@
           <a:lstStyle/>
           <a:p>
             <a:pPr indent="0" lvl="0" marL="0" marR="0" rtl="0" algn="r">
+              <a:lnSpc>
+                <a:spcPct val="100000"/>
+              </a:lnSpc>
               <a:spcBef>
                 <a:spcPts val="0"/>
               </a:spcBef>
@@ -18687,6 +19567,9 @@
           <a:lstStyle/>
           <a:p>
             <a:pPr indent="0" lvl="0" marL="0" marR="0" rtl="0" algn="l">
+              <a:lnSpc>
+                <a:spcPct val="100000"/>
+              </a:lnSpc>
               <a:spcBef>
                 <a:spcPts val="0"/>
               </a:spcBef>
@@ -18750,6 +19633,9 @@
           <a:lstStyle/>
           <a:p>
             <a:pPr indent="0" lvl="0" marL="0" marR="0" rtl="0" algn="l">
+              <a:lnSpc>
+                <a:spcPct val="100000"/>
+              </a:lnSpc>
               <a:spcBef>
                 <a:spcPts val="0"/>
               </a:spcBef>
@@ -18867,6 +19753,9 @@
           <a:lstStyle/>
           <a:p>
             <a:pPr indent="0" lvl="0" marL="0" marR="0" rtl="0" algn="ctr">
+              <a:lnSpc>
+                <a:spcPct val="100000"/>
+              </a:lnSpc>
               <a:spcBef>
                 <a:spcPts val="0"/>
               </a:spcBef>
@@ -18930,6 +19819,9 @@
           <a:lstStyle/>
           <a:p>
             <a:pPr indent="0" lvl="0" marL="0" marR="0" rtl="0" algn="ctr">
+              <a:lnSpc>
+                <a:spcPct val="100000"/>
+              </a:lnSpc>
               <a:spcBef>
                 <a:spcPts val="0"/>
               </a:spcBef>
@@ -18993,6 +19885,9 @@
           <a:lstStyle/>
           <a:p>
             <a:pPr indent="0" lvl="0" marL="0" marR="0" rtl="0" algn="ctr">
+              <a:lnSpc>
+                <a:spcPct val="100000"/>
+              </a:lnSpc>
               <a:spcBef>
                 <a:spcPts val="0"/>
               </a:spcBef>
@@ -19056,6 +19951,9 @@
           <a:lstStyle/>
           <a:p>
             <a:pPr indent="0" lvl="0" marL="0" marR="0" rtl="0" algn="ctr">
+              <a:lnSpc>
+                <a:spcPct val="100000"/>
+              </a:lnSpc>
               <a:spcBef>
                 <a:spcPts val="0"/>
               </a:spcBef>
@@ -19119,6 +20017,9 @@
           <a:lstStyle/>
           <a:p>
             <a:pPr indent="0" lvl="0" marL="0" marR="0" rtl="0" algn="l">
+              <a:lnSpc>
+                <a:spcPct val="100000"/>
+              </a:lnSpc>
               <a:spcBef>
                 <a:spcPts val="0"/>
               </a:spcBef>
@@ -19208,6 +20109,9 @@
           <a:lstStyle/>
           <a:p>
             <a:pPr indent="0" lvl="0" marL="0" marR="0" rtl="0" algn="r">
+              <a:lnSpc>
+                <a:spcPct val="100000"/>
+              </a:lnSpc>
               <a:spcBef>
                 <a:spcPts val="0"/>
               </a:spcBef>
@@ -19303,6 +20207,9 @@
           <a:lstStyle/>
           <a:p>
             <a:pPr indent="0" lvl="0" marL="0" marR="0" rtl="0" algn="l">
+              <a:lnSpc>
+                <a:spcPct val="100000"/>
+              </a:lnSpc>
               <a:spcBef>
                 <a:spcPts val="0"/>
               </a:spcBef>
@@ -19366,6 +20273,9 @@
           <a:lstStyle/>
           <a:p>
             <a:pPr indent="0" lvl="0" marL="0" marR="0" rtl="0" algn="l">
+              <a:lnSpc>
+                <a:spcPct val="100000"/>
+              </a:lnSpc>
               <a:spcBef>
                 <a:spcPts val="0"/>
               </a:spcBef>
@@ -19439,7 +20349,7 @@
         <p:spPr>
           <a:xfrm>
             <a:off x="6406286" y="1514246"/>
-            <a:ext cx="1029157" cy="377647"/>
+            <a:ext cx="1029300" cy="377700"/>
           </a:xfrm>
           <a:prstGeom prst="rect">
             <a:avLst/>
@@ -19463,7 +20373,10 @@
           </a:bodyPr>
           <a:lstStyle/>
           <a:p>
-            <a:pPr indent="0" lvl="0" marL="0" marR="0" rtl="0" algn="l">
+            <a:pPr indent="0" lvl="0" marL="0" marR="0" rtl="0" algn="ctr">
+              <a:lnSpc>
+                <a:spcPct val="100000"/>
+              </a:lnSpc>
               <a:spcBef>
                 <a:spcPts val="0"/>
               </a:spcBef>
@@ -19535,6 +20448,9 @@
           <a:lstStyle/>
           <a:p>
             <a:pPr indent="0" lvl="0" marL="0" marR="0" rtl="0" algn="ctr">
+              <a:lnSpc>
+                <a:spcPct val="100000"/>
+              </a:lnSpc>
               <a:spcBef>
                 <a:spcPts val="0"/>
               </a:spcBef>
@@ -19606,6 +20522,9 @@
           <a:lstStyle/>
           <a:p>
             <a:pPr indent="0" lvl="0" marL="0" marR="0" rtl="0" algn="ctr">
+              <a:lnSpc>
+                <a:spcPct val="100000"/>
+              </a:lnSpc>
               <a:spcBef>
                 <a:spcPts val="0"/>
               </a:spcBef>
@@ -19677,6 +20596,9 @@
           <a:lstStyle/>
           <a:p>
             <a:pPr indent="0" lvl="0" marL="0" marR="0" rtl="0" algn="ctr">
+              <a:lnSpc>
+                <a:spcPct val="100000"/>
+              </a:lnSpc>
               <a:spcBef>
                 <a:spcPts val="0"/>
               </a:spcBef>
@@ -19747,7 +20669,10 @@
           </a:bodyPr>
           <a:lstStyle/>
           <a:p>
-            <a:pPr indent="0" lvl="0" marL="0" marR="0" rtl="0" algn="l">
+            <a:pPr indent="0" lvl="0" marL="0" marR="0" rtl="0" algn="ctr">
+              <a:lnSpc>
+                <a:spcPct val="100000"/>
+              </a:lnSpc>
               <a:spcBef>
                 <a:spcPts val="0"/>
               </a:spcBef>
@@ -19819,6 +20744,9 @@
           <a:lstStyle/>
           <a:p>
             <a:pPr indent="0" lvl="0" marL="0" marR="0" rtl="0" algn="ctr">
+              <a:lnSpc>
+                <a:spcPct val="100000"/>
+              </a:lnSpc>
               <a:spcBef>
                 <a:spcPts val="0"/>
               </a:spcBef>
@@ -19890,6 +20818,9 @@
           <a:lstStyle/>
           <a:p>
             <a:pPr indent="0" lvl="0" marL="0" marR="0" rtl="0" algn="ctr">
+              <a:lnSpc>
+                <a:spcPct val="100000"/>
+              </a:lnSpc>
               <a:spcBef>
                 <a:spcPts val="0"/>
               </a:spcBef>
@@ -19961,6 +20892,9 @@
           <a:lstStyle/>
           <a:p>
             <a:pPr indent="0" lvl="0" marL="0" marR="0" rtl="0" algn="ctr">
+              <a:lnSpc>
+                <a:spcPct val="100000"/>
+              </a:lnSpc>
               <a:spcBef>
                 <a:spcPts val="0"/>
               </a:spcBef>
@@ -20031,7 +20965,10 @@
           </a:bodyPr>
           <a:lstStyle/>
           <a:p>
-            <a:pPr indent="0" lvl="0" marL="0" marR="0" rtl="0" algn="l">
+            <a:pPr indent="0" lvl="0" marL="0" marR="0" rtl="0" algn="ctr">
+              <a:lnSpc>
+                <a:spcPct val="100000"/>
+              </a:lnSpc>
               <a:spcBef>
                 <a:spcPts val="0"/>
               </a:spcBef>
@@ -20103,6 +21040,9 @@
           <a:lstStyle/>
           <a:p>
             <a:pPr indent="0" lvl="0" marL="0" marR="0" rtl="0" algn="ctr">
+              <a:lnSpc>
+                <a:spcPct val="100000"/>
+              </a:lnSpc>
               <a:spcBef>
                 <a:spcPts val="0"/>
               </a:spcBef>
@@ -20174,6 +21114,9 @@
           <a:lstStyle/>
           <a:p>
             <a:pPr indent="0" lvl="0" marL="0" marR="0" rtl="0" algn="ctr">
+              <a:lnSpc>
+                <a:spcPct val="100000"/>
+              </a:lnSpc>
               <a:spcBef>
                 <a:spcPts val="0"/>
               </a:spcBef>
@@ -20245,6 +21188,9 @@
           <a:lstStyle/>
           <a:p>
             <a:pPr indent="0" lvl="0" marL="0" marR="0" rtl="0" algn="ctr">
+              <a:lnSpc>
+                <a:spcPct val="100000"/>
+              </a:lnSpc>
               <a:spcBef>
                 <a:spcPts val="0"/>
               </a:spcBef>
@@ -20315,7 +21261,10 @@
           </a:bodyPr>
           <a:lstStyle/>
           <a:p>
-            <a:pPr indent="0" lvl="0" marL="0" marR="0" rtl="0" algn="l">
+            <a:pPr indent="0" lvl="0" marL="0" marR="0" rtl="0" algn="ctr">
+              <a:lnSpc>
+                <a:spcPct val="100000"/>
+              </a:lnSpc>
               <a:spcBef>
                 <a:spcPts val="0"/>
               </a:spcBef>
@@ -20387,6 +21336,9 @@
           <a:lstStyle/>
           <a:p>
             <a:pPr indent="0" lvl="0" marL="0" marR="0" rtl="0" algn="ctr">
+              <a:lnSpc>
+                <a:spcPct val="100000"/>
+              </a:lnSpc>
               <a:spcBef>
                 <a:spcPts val="0"/>
               </a:spcBef>
@@ -20458,6 +21410,9 @@
           <a:lstStyle/>
           <a:p>
             <a:pPr indent="0" lvl="0" marL="0" marR="0" rtl="0" algn="ctr">
+              <a:lnSpc>
+                <a:spcPct val="100000"/>
+              </a:lnSpc>
               <a:spcBef>
                 <a:spcPts val="0"/>
               </a:spcBef>
@@ -20529,6 +21484,9 @@
           <a:lstStyle/>
           <a:p>
             <a:pPr indent="0" lvl="0" marL="0" marR="0" rtl="0" algn="ctr">
+              <a:lnSpc>
+                <a:spcPct val="100000"/>
+              </a:lnSpc>
               <a:spcBef>
                 <a:spcPts val="0"/>
               </a:spcBef>
@@ -20592,6 +21550,9 @@
           <a:lstStyle/>
           <a:p>
             <a:pPr indent="0" lvl="0" marL="0" marR="0" rtl="0" algn="ctr">
+              <a:lnSpc>
+                <a:spcPct val="100000"/>
+              </a:lnSpc>
               <a:spcBef>
                 <a:spcPts val="0"/>
               </a:spcBef>
@@ -20655,6 +21616,9 @@
           <a:lstStyle/>
           <a:p>
             <a:pPr indent="0" lvl="0" marL="0" marR="0" rtl="0" algn="ctr">
+              <a:lnSpc>
+                <a:spcPct val="100000"/>
+              </a:lnSpc>
               <a:spcBef>
                 <a:spcPts val="0"/>
               </a:spcBef>
@@ -20718,6 +21682,9 @@
           <a:lstStyle/>
           <a:p>
             <a:pPr indent="0" lvl="0" marL="0" marR="0" rtl="0" algn="l">
+              <a:lnSpc>
+                <a:spcPct val="100000"/>
+              </a:lnSpc>
               <a:spcBef>
                 <a:spcPts val="0"/>
               </a:spcBef>
@@ -20807,6 +21774,9 @@
           <a:lstStyle/>
           <a:p>
             <a:pPr indent="0" lvl="0" marL="0" marR="0" rtl="0" algn="r">
+              <a:lnSpc>
+                <a:spcPct val="100000"/>
+              </a:lnSpc>
               <a:spcBef>
                 <a:spcPts val="0"/>
               </a:spcBef>
